--- a/documents/finance analytics presentation.pptx
+++ b/documents/finance analytics presentation.pptx
@@ -7,36 +7,37 @@
   <p:sldIdLst>
     <p:sldId id="256" r:id="rId2"/>
     <p:sldId id="257" r:id="rId3"/>
-    <p:sldId id="258" r:id="rId4"/>
-    <p:sldId id="259" r:id="rId5"/>
-    <p:sldId id="260" r:id="rId6"/>
-    <p:sldId id="261" r:id="rId7"/>
-    <p:sldId id="262" r:id="rId8"/>
-    <p:sldId id="263" r:id="rId9"/>
-    <p:sldId id="264" r:id="rId10"/>
+    <p:sldId id="265" r:id="rId4"/>
+    <p:sldId id="258" r:id="rId5"/>
+    <p:sldId id="259" r:id="rId6"/>
+    <p:sldId id="260" r:id="rId7"/>
+    <p:sldId id="261" r:id="rId8"/>
+    <p:sldId id="262" r:id="rId9"/>
+    <p:sldId id="263" r:id="rId10"/>
+    <p:sldId id="264" r:id="rId11"/>
   </p:sldIdLst>
   <p:sldSz cx="18288000" cy="10287000"/>
   <p:notesSz cx="6858000" cy="9144000"/>
   <p:embeddedFontLst>
     <p:embeddedFont>
       <p:font typeface="Josefin Sans" pitchFamily="2" charset="0"/>
-      <p:regular r:id="rId11"/>
+      <p:regular r:id="rId12"/>
     </p:embeddedFont>
     <p:embeddedFont>
       <p:font typeface="Josefin Sans Light" pitchFamily="2" charset="0"/>
-      <p:regular r:id="rId12"/>
+      <p:regular r:id="rId13"/>
     </p:embeddedFont>
     <p:embeddedFont>
       <p:font typeface="Open Sans" panose="020B0606030504020204" pitchFamily="34" charset="0"/>
-      <p:regular r:id="rId13"/>
+      <p:regular r:id="rId14"/>
     </p:embeddedFont>
     <p:embeddedFont>
       <p:font typeface="Open Sans Bold" panose="020B0806030504020204" charset="0"/>
-      <p:regular r:id="rId14"/>
+      <p:regular r:id="rId15"/>
     </p:embeddedFont>
     <p:embeddedFont>
       <p:font typeface="Open Sans Light" panose="020B0306030504020204" pitchFamily="34" charset="0"/>
-      <p:regular r:id="rId15"/>
+      <p:regular r:id="rId16"/>
     </p:embeddedFont>
   </p:embeddedFontLst>
   <p:defaultTextStyle>
@@ -156,7 +157,7 @@
 <file path=ppt/revisionInfo.xml><?xml version="1.0" encoding="utf-8"?>
 <p1510:revInfo xmlns:a="http://schemas.openxmlformats.org/drawingml/2006/main" xmlns:r="http://schemas.openxmlformats.org/officeDocument/2006/relationships" xmlns:p1510="http://schemas.microsoft.com/office/powerpoint/2015/10/main">
   <p1510:revLst>
-    <p1510:client id="{CD4FFDA1-E554-4C80-929C-1CF343161DB5}" v="7" dt="2026-04-08T01:25:58.520"/>
+    <p1510:client id="{CD4FFDA1-E554-4C80-929C-1CF343161DB5}" v="12" dt="2026-04-12T13:05:53.581"/>
   </p1510:revLst>
 </p1510:revInfo>
 </file>
@@ -166,7 +167,7 @@
   <pc:docChgLst>
     <pc:chgData name="Muchammad Wildan Alkautsar" userId="360672ed2ee56274" providerId="LiveId" clId="{F5771622-C242-4EFB-9359-41E4DFBD7538}"/>
     <pc:docChg chg="undo custSel addSld delSld modSld">
-      <pc:chgData name="Muchammad Wildan Alkautsar" userId="360672ed2ee56274" providerId="LiveId" clId="{F5771622-C242-4EFB-9359-41E4DFBD7538}" dt="2026-04-08T01:27:46.026" v="166" actId="2711"/>
+      <pc:chgData name="Muchammad Wildan Alkautsar" userId="360672ed2ee56274" providerId="LiveId" clId="{F5771622-C242-4EFB-9359-41E4DFBD7538}" dt="2026-04-19T06:33:36.642" v="248" actId="2890"/>
       <pc:docMkLst>
         <pc:docMk/>
       </pc:docMkLst>
@@ -201,8 +202,8 @@
           </ac:spMkLst>
         </pc:spChg>
       </pc:sldChg>
-      <pc:sldChg chg="modSp mod">
-        <pc:chgData name="Muchammad Wildan Alkautsar" userId="360672ed2ee56274" providerId="LiveId" clId="{F5771622-C242-4EFB-9359-41E4DFBD7538}" dt="2026-04-08T01:26:24.672" v="158" actId="2711"/>
+      <pc:sldChg chg="addSp delSp modSp mod">
+        <pc:chgData name="Muchammad Wildan Alkautsar" userId="360672ed2ee56274" providerId="LiveId" clId="{F5771622-C242-4EFB-9359-41E4DFBD7538}" dt="2026-04-12T13:04:15.690" v="237" actId="208"/>
         <pc:sldMkLst>
           <pc:docMk/>
           <pc:sldMk cId="0" sldId="257"/>
@@ -216,16 +217,40 @@
           </ac:spMkLst>
         </pc:spChg>
         <pc:spChg chg="mod">
-          <ac:chgData name="Muchammad Wildan Alkautsar" userId="360672ed2ee56274" providerId="LiveId" clId="{F5771622-C242-4EFB-9359-41E4DFBD7538}" dt="2026-04-08T01:26:24.672" v="158" actId="2711"/>
+          <ac:chgData name="Muchammad Wildan Alkautsar" userId="360672ed2ee56274" providerId="LiveId" clId="{F5771622-C242-4EFB-9359-41E4DFBD7538}" dt="2026-04-12T13:00:21.627" v="177" actId="20577"/>
           <ac:spMkLst>
             <pc:docMk/>
             <pc:sldMk cId="0" sldId="257"/>
             <ac:spMk id="8" creationId="{00000000-0000-0000-0000-000000000000}"/>
           </ac:spMkLst>
         </pc:spChg>
+        <pc:spChg chg="add del mod">
+          <ac:chgData name="Muchammad Wildan Alkautsar" userId="360672ed2ee56274" providerId="LiveId" clId="{F5771622-C242-4EFB-9359-41E4DFBD7538}" dt="2026-04-12T13:03:31.789" v="232" actId="1582"/>
+          <ac:spMkLst>
+            <pc:docMk/>
+            <pc:sldMk cId="0" sldId="257"/>
+            <ac:spMk id="29" creationId="{BC15E850-FF4F-ECA6-8FB5-AB80619F07A7}"/>
+          </ac:spMkLst>
+        </pc:spChg>
+        <pc:spChg chg="add mod">
+          <ac:chgData name="Muchammad Wildan Alkautsar" userId="360672ed2ee56274" providerId="LiveId" clId="{F5771622-C242-4EFB-9359-41E4DFBD7538}" dt="2026-04-12T13:04:15.690" v="237" actId="208"/>
+          <ac:spMkLst>
+            <pc:docMk/>
+            <pc:sldMk cId="0" sldId="257"/>
+            <ac:spMk id="31" creationId="{7EADF9FF-2C20-8F6F-CA17-F23BF657645F}"/>
+          </ac:spMkLst>
+        </pc:spChg>
+        <pc:picChg chg="add mod">
+          <ac:chgData name="Muchammad Wildan Alkautsar" userId="360672ed2ee56274" providerId="LiveId" clId="{F5771622-C242-4EFB-9359-41E4DFBD7538}" dt="2026-04-12T13:03:39.734" v="235" actId="1076"/>
+          <ac:picMkLst>
+            <pc:docMk/>
+            <pc:sldMk cId="0" sldId="257"/>
+            <ac:picMk id="14" creationId="{0DBCBB5A-7CF2-CA76-187E-22AF6965ACE1}"/>
+          </ac:picMkLst>
+        </pc:picChg>
       </pc:sldChg>
-      <pc:sldChg chg="modSp mod">
-        <pc:chgData name="Muchammad Wildan Alkautsar" userId="360672ed2ee56274" providerId="LiveId" clId="{F5771622-C242-4EFB-9359-41E4DFBD7538}" dt="2026-04-08T01:27:46.026" v="166" actId="2711"/>
+      <pc:sldChg chg="addSp delSp modSp mod">
+        <pc:chgData name="Muchammad Wildan Alkautsar" userId="360672ed2ee56274" providerId="LiveId" clId="{F5771622-C242-4EFB-9359-41E4DFBD7538}" dt="2026-04-12T13:05:58.629" v="245" actId="1076"/>
         <pc:sldMkLst>
           <pc:docMk/>
           <pc:sldMk cId="0" sldId="258"/>
@@ -255,11 +280,27 @@
           </ac:spMkLst>
         </pc:spChg>
         <pc:spChg chg="mod">
-          <ac:chgData name="Muchammad Wildan Alkautsar" userId="360672ed2ee56274" providerId="LiveId" clId="{F5771622-C242-4EFB-9359-41E4DFBD7538}" dt="2026-04-08T01:27:32.004" v="163" actId="2711"/>
+          <ac:chgData name="Muchammad Wildan Alkautsar" userId="360672ed2ee56274" providerId="LiveId" clId="{F5771622-C242-4EFB-9359-41E4DFBD7538}" dt="2026-04-12T13:00:49.095" v="183" actId="113"/>
           <ac:spMkLst>
             <pc:docMk/>
             <pc:sldMk cId="0" sldId="258"/>
             <ac:spMk id="8" creationId="{00000000-0000-0000-0000-000000000000}"/>
+          </ac:spMkLst>
+        </pc:spChg>
+        <pc:spChg chg="add mod">
+          <ac:chgData name="Muchammad Wildan Alkautsar" userId="360672ed2ee56274" providerId="LiveId" clId="{F5771622-C242-4EFB-9359-41E4DFBD7538}" dt="2026-04-12T13:05:41.853" v="243" actId="1076"/>
+          <ac:spMkLst>
+            <pc:docMk/>
+            <pc:sldMk cId="0" sldId="258"/>
+            <ac:spMk id="13" creationId="{B6AA9918-384B-3B6E-10A6-BE1A9B5A91F7}"/>
+          </ac:spMkLst>
+        </pc:spChg>
+        <pc:spChg chg="add mod">
+          <ac:chgData name="Muchammad Wildan Alkautsar" userId="360672ed2ee56274" providerId="LiveId" clId="{F5771622-C242-4EFB-9359-41E4DFBD7538}" dt="2026-04-12T13:05:58.629" v="245" actId="1076"/>
+          <ac:spMkLst>
+            <pc:docMk/>
+            <pc:sldMk cId="0" sldId="258"/>
+            <ac:spMk id="14" creationId="{65610A73-AC9C-FE19-D2E0-45D43D204585}"/>
           </ac:spMkLst>
         </pc:spChg>
       </pc:sldChg>
@@ -269,46 +310,6 @@
           <pc:docMk/>
           <pc:sldMk cId="0" sldId="262"/>
         </pc:sldMkLst>
-        <pc:spChg chg="add del">
-          <ac:chgData name="Muchammad Wildan Alkautsar" userId="360672ed2ee56274" providerId="LiveId" clId="{F5771622-C242-4EFB-9359-41E4DFBD7538}" dt="2026-04-07T09:44:48.554" v="12" actId="478"/>
-          <ac:spMkLst>
-            <pc:docMk/>
-            <pc:sldMk cId="0" sldId="262"/>
-            <ac:spMk id="8" creationId="{00000000-0000-0000-0000-000000000000}"/>
-          </ac:spMkLst>
-        </pc:spChg>
-        <pc:picChg chg="add del mod">
-          <ac:chgData name="Muchammad Wildan Alkautsar" userId="360672ed2ee56274" providerId="LiveId" clId="{F5771622-C242-4EFB-9359-41E4DFBD7538}" dt="2026-04-07T09:44:40.925" v="4" actId="22"/>
-          <ac:picMkLst>
-            <pc:docMk/>
-            <pc:sldMk cId="0" sldId="262"/>
-            <ac:picMk id="10" creationId="{2D7A1F32-2BB9-1940-EA19-0F04871E9835}"/>
-          </ac:picMkLst>
-        </pc:picChg>
-        <pc:picChg chg="add del">
-          <ac:chgData name="Muchammad Wildan Alkautsar" userId="360672ed2ee56274" providerId="LiveId" clId="{F5771622-C242-4EFB-9359-41E4DFBD7538}" dt="2026-04-07T09:44:43.498" v="7" actId="22"/>
-          <ac:picMkLst>
-            <pc:docMk/>
-            <pc:sldMk cId="0" sldId="262"/>
-            <ac:picMk id="12" creationId="{D072BA54-0389-D1D8-1C67-BC0A69024457}"/>
-          </ac:picMkLst>
-        </pc:picChg>
-        <pc:picChg chg="add del">
-          <ac:chgData name="Muchammad Wildan Alkautsar" userId="360672ed2ee56274" providerId="LiveId" clId="{F5771622-C242-4EFB-9359-41E4DFBD7538}" dt="2026-04-07T09:44:45.778" v="9" actId="22"/>
-          <ac:picMkLst>
-            <pc:docMk/>
-            <pc:sldMk cId="0" sldId="262"/>
-            <ac:picMk id="14" creationId="{88A16B35-8F59-72EA-AF7F-1BB0EF8BA21E}"/>
-          </ac:picMkLst>
-        </pc:picChg>
-        <pc:picChg chg="add del">
-          <ac:chgData name="Muchammad Wildan Alkautsar" userId="360672ed2ee56274" providerId="LiveId" clId="{F5771622-C242-4EFB-9359-41E4DFBD7538}" dt="2026-04-07T09:44:47.570" v="11" actId="22"/>
-          <ac:picMkLst>
-            <pc:docMk/>
-            <pc:sldMk cId="0" sldId="262"/>
-            <ac:picMk id="16" creationId="{92239236-F8FD-012B-EC80-55106999892C}"/>
-          </ac:picMkLst>
-        </pc:picChg>
         <pc:picChg chg="add mod">
           <ac:chgData name="Muchammad Wildan Alkautsar" userId="360672ed2ee56274" providerId="LiveId" clId="{F5771622-C242-4EFB-9359-41E4DFBD7538}" dt="2026-04-07T09:44:52.014" v="15" actId="14100"/>
           <ac:picMkLst>
@@ -324,22 +325,6 @@
           <pc:docMk/>
           <pc:sldMk cId="1134590727" sldId="264"/>
         </pc:sldMkLst>
-        <pc:spChg chg="del">
-          <ac:chgData name="Muchammad Wildan Alkautsar" userId="360672ed2ee56274" providerId="LiveId" clId="{F5771622-C242-4EFB-9359-41E4DFBD7538}" dt="2026-04-08T01:14:20.606" v="19" actId="478"/>
-          <ac:spMkLst>
-            <pc:docMk/>
-            <pc:sldMk cId="1134590727" sldId="264"/>
-            <ac:spMk id="4" creationId="{F4200446-2F99-7A6D-C2CD-5813DBF5F75C}"/>
-          </ac:spMkLst>
-        </pc:spChg>
-        <pc:spChg chg="del mod">
-          <ac:chgData name="Muchammad Wildan Alkautsar" userId="360672ed2ee56274" providerId="LiveId" clId="{F5771622-C242-4EFB-9359-41E4DFBD7538}" dt="2026-04-08T01:14:23.612" v="22"/>
-          <ac:spMkLst>
-            <pc:docMk/>
-            <pc:sldMk cId="1134590727" sldId="264"/>
-            <ac:spMk id="7" creationId="{732903B6-52D8-63F1-E94F-D3A0C5AD7D48}"/>
-          </ac:spMkLst>
-        </pc:spChg>
         <pc:spChg chg="add mod ord">
           <ac:chgData name="Muchammad Wildan Alkautsar" userId="360672ed2ee56274" providerId="LiveId" clId="{F5771622-C242-4EFB-9359-41E4DFBD7538}" dt="2026-04-08T01:19:11.897" v="63" actId="207"/>
           <ac:spMkLst>
@@ -357,11 +342,18 @@
           </ac:spMkLst>
         </pc:spChg>
       </pc:sldChg>
-      <pc:sldChg chg="new del">
-        <pc:chgData name="Muchammad Wildan Alkautsar" userId="360672ed2ee56274" providerId="LiveId" clId="{F5771622-C242-4EFB-9359-41E4DFBD7538}" dt="2026-04-08T01:14:15.409" v="17" actId="680"/>
+      <pc:sldChg chg="add">
+        <pc:chgData name="Muchammad Wildan Alkautsar" userId="360672ed2ee56274" providerId="LiveId" clId="{F5771622-C242-4EFB-9359-41E4DFBD7538}" dt="2026-04-19T06:33:36.642" v="248" actId="2890"/>
         <pc:sldMkLst>
           <pc:docMk/>
-          <pc:sldMk cId="2820851979" sldId="264"/>
+          <pc:sldMk cId="2401670062" sldId="265"/>
+        </pc:sldMkLst>
+      </pc:sldChg>
+      <pc:sldChg chg="new del">
+        <pc:chgData name="Muchammad Wildan Alkautsar" userId="360672ed2ee56274" providerId="LiveId" clId="{F5771622-C242-4EFB-9359-41E4DFBD7538}" dt="2026-04-19T06:33:35.384" v="247" actId="680"/>
+        <pc:sldMkLst>
+          <pc:docMk/>
+          <pc:sldMk cId="2938543918" sldId="265"/>
         </pc:sldMkLst>
       </pc:sldChg>
     </pc:docChg>
@@ -549,7 +541,7 @@
             <a:fld id="{1D8BD707-D9CF-40AE-B4C6-C98DA3205C09}" type="datetimeFigureOut">
               <a:rPr lang="en-US" smtClean="0"/>
               <a:pPr/>
-              <a:t>4/8/2026</a:t>
+              <a:t>4/19/2026</a:t>
             </a:fld>
             <a:endParaRPr lang="en-US"/>
           </a:p>
@@ -714,7 +706,7 @@
             <a:fld id="{1D8BD707-D9CF-40AE-B4C6-C98DA3205C09}" type="datetimeFigureOut">
               <a:rPr lang="en-US" smtClean="0"/>
               <a:pPr/>
-              <a:t>4/8/2026</a:t>
+              <a:t>4/19/2026</a:t>
             </a:fld>
             <a:endParaRPr lang="en-US"/>
           </a:p>
@@ -889,7 +881,7 @@
             <a:fld id="{1D8BD707-D9CF-40AE-B4C6-C98DA3205C09}" type="datetimeFigureOut">
               <a:rPr lang="en-US" smtClean="0"/>
               <a:pPr/>
-              <a:t>4/8/2026</a:t>
+              <a:t>4/19/2026</a:t>
             </a:fld>
             <a:endParaRPr lang="en-US"/>
           </a:p>
@@ -1054,7 +1046,7 @@
             <a:fld id="{1D8BD707-D9CF-40AE-B4C6-C98DA3205C09}" type="datetimeFigureOut">
               <a:rPr lang="en-US" smtClean="0"/>
               <a:pPr/>
-              <a:t>4/8/2026</a:t>
+              <a:t>4/19/2026</a:t>
             </a:fld>
             <a:endParaRPr lang="en-US"/>
           </a:p>
@@ -1296,7 +1288,7 @@
             <a:fld id="{1D8BD707-D9CF-40AE-B4C6-C98DA3205C09}" type="datetimeFigureOut">
               <a:rPr lang="en-US" smtClean="0"/>
               <a:pPr/>
-              <a:t>4/8/2026</a:t>
+              <a:t>4/19/2026</a:t>
             </a:fld>
             <a:endParaRPr lang="en-US"/>
           </a:p>
@@ -1578,7 +1570,7 @@
             <a:fld id="{1D8BD707-D9CF-40AE-B4C6-C98DA3205C09}" type="datetimeFigureOut">
               <a:rPr lang="en-US" smtClean="0"/>
               <a:pPr/>
-              <a:t>4/8/2026</a:t>
+              <a:t>4/19/2026</a:t>
             </a:fld>
             <a:endParaRPr lang="en-US"/>
           </a:p>
@@ -1994,7 +1986,7 @@
             <a:fld id="{1D8BD707-D9CF-40AE-B4C6-C98DA3205C09}" type="datetimeFigureOut">
               <a:rPr lang="en-US" smtClean="0"/>
               <a:pPr/>
-              <a:t>4/8/2026</a:t>
+              <a:t>4/19/2026</a:t>
             </a:fld>
             <a:endParaRPr lang="en-US"/>
           </a:p>
@@ -2108,7 +2100,7 @@
             <a:fld id="{1D8BD707-D9CF-40AE-B4C6-C98DA3205C09}" type="datetimeFigureOut">
               <a:rPr lang="en-US" smtClean="0"/>
               <a:pPr/>
-              <a:t>4/8/2026</a:t>
+              <a:t>4/19/2026</a:t>
             </a:fld>
             <a:endParaRPr lang="en-US"/>
           </a:p>
@@ -2200,7 +2192,7 @@
             <a:fld id="{1D8BD707-D9CF-40AE-B4C6-C98DA3205C09}" type="datetimeFigureOut">
               <a:rPr lang="en-US" smtClean="0"/>
               <a:pPr/>
-              <a:t>4/8/2026</a:t>
+              <a:t>4/19/2026</a:t>
             </a:fld>
             <a:endParaRPr lang="en-US"/>
           </a:p>
@@ -2472,7 +2464,7 @@
             <a:fld id="{1D8BD707-D9CF-40AE-B4C6-C98DA3205C09}" type="datetimeFigureOut">
               <a:rPr lang="en-US" smtClean="0"/>
               <a:pPr/>
-              <a:t>4/8/2026</a:t>
+              <a:t>4/19/2026</a:t>
             </a:fld>
             <a:endParaRPr lang="en-US"/>
           </a:p>
@@ -2721,7 +2713,7 @@
             <a:fld id="{1D8BD707-D9CF-40AE-B4C6-C98DA3205C09}" type="datetimeFigureOut">
               <a:rPr lang="en-US" smtClean="0"/>
               <a:pPr/>
-              <a:t>4/8/2026</a:t>
+              <a:t>4/19/2026</a:t>
             </a:fld>
             <a:endParaRPr lang="en-US"/>
           </a:p>
@@ -2929,7 +2921,7 @@
             <a:fld id="{1D8BD707-D9CF-40AE-B4C6-C98DA3205C09}" type="datetimeFigureOut">
               <a:rPr lang="en-US" smtClean="0"/>
               <a:pPr/>
-              <a:t>4/8/2026</a:t>
+              <a:t>4/19/2026</a:t>
             </a:fld>
             <a:endParaRPr lang="en-US"/>
           </a:p>
@@ -3636,6 +3628,431 @@
 </p:sld>
 </file>
 
+<file path=ppt/slides/slide10.xml><?xml version="1.0" encoding="utf-8"?>
+<p:sld xmlns:a="http://schemas.openxmlformats.org/drawingml/2006/main" xmlns:r="http://schemas.openxmlformats.org/officeDocument/2006/relationships" xmlns:p="http://schemas.openxmlformats.org/presentationml/2006/main">
+  <p:cSld>
+    <p:bg>
+      <p:bgPr>
+        <a:solidFill>
+          <a:srgbClr val="172944"/>
+        </a:solidFill>
+        <a:effectLst/>
+      </p:bgPr>
+    </p:bg>
+    <p:spTree>
+      <p:nvGrpSpPr>
+        <p:cNvPr id="1" name="">
+          <a:extLst>
+            <a:ext uri="{FF2B5EF4-FFF2-40B4-BE49-F238E27FC236}">
+              <a16:creationId xmlns:a16="http://schemas.microsoft.com/office/drawing/2014/main" id="{166BECD6-AFE9-3503-71DE-A6C8D070B8E3}"/>
+            </a:ext>
+          </a:extLst>
+        </p:cNvPr>
+        <p:cNvGrpSpPr/>
+        <p:nvPr/>
+      </p:nvGrpSpPr>
+      <p:grpSpPr>
+        <a:xfrm>
+          <a:off x="0" y="0"/>
+          <a:ext cx="0" cy="0"/>
+          <a:chOff x="0" y="0"/>
+          <a:chExt cx="0" cy="0"/>
+        </a:xfrm>
+      </p:grpSpPr>
+      <p:sp>
+        <p:nvSpPr>
+          <p:cNvPr id="2" name="AutoShape 2">
+            <a:extLst>
+              <a:ext uri="{FF2B5EF4-FFF2-40B4-BE49-F238E27FC236}">
+                <a16:creationId xmlns:a16="http://schemas.microsoft.com/office/drawing/2014/main" id="{05BBD870-0FDE-413D-A53C-EF5499150FE1}"/>
+              </a:ext>
+            </a:extLst>
+          </p:cNvPr>
+          <p:cNvSpPr/>
+          <p:nvPr/>
+        </p:nvSpPr>
+        <p:spPr>
+          <a:xfrm flipV="1">
+            <a:off x="17580241" y="513682"/>
+            <a:ext cx="0" cy="354402"/>
+          </a:xfrm>
+          <a:prstGeom prst="line">
+            <a:avLst/>
+          </a:prstGeom>
+          <a:ln w="19050" cap="flat">
+            <a:solidFill>
+              <a:srgbClr val="FFFFFF"/>
+            </a:solidFill>
+            <a:prstDash val="solid"/>
+            <a:headEnd type="none" w="sm" len="sm"/>
+            <a:tailEnd type="none" w="sm" len="sm"/>
+          </a:ln>
+        </p:spPr>
+      </p:sp>
+      <p:sp>
+        <p:nvSpPr>
+          <p:cNvPr id="3" name="AutoShape 3">
+            <a:extLst>
+              <a:ext uri="{FF2B5EF4-FFF2-40B4-BE49-F238E27FC236}">
+                <a16:creationId xmlns:a16="http://schemas.microsoft.com/office/drawing/2014/main" id="{939CFFC3-1356-07D5-295C-AEC67FF701F3}"/>
+              </a:ext>
+            </a:extLst>
+          </p:cNvPr>
+          <p:cNvSpPr/>
+          <p:nvPr/>
+        </p:nvSpPr>
+        <p:spPr>
+          <a:xfrm flipV="1">
+            <a:off x="17692515" y="513682"/>
+            <a:ext cx="0" cy="354402"/>
+          </a:xfrm>
+          <a:prstGeom prst="line">
+            <a:avLst/>
+          </a:prstGeom>
+          <a:ln w="19050" cap="flat">
+            <a:solidFill>
+              <a:srgbClr val="FFFFFF"/>
+            </a:solidFill>
+            <a:prstDash val="solid"/>
+            <a:headEnd type="none" w="sm" len="sm"/>
+            <a:tailEnd type="none" w="sm" len="sm"/>
+          </a:ln>
+        </p:spPr>
+      </p:sp>
+      <p:sp>
+        <p:nvSpPr>
+          <p:cNvPr id="5" name="TextBox 5">
+            <a:extLst>
+              <a:ext uri="{FF2B5EF4-FFF2-40B4-BE49-F238E27FC236}">
+                <a16:creationId xmlns:a16="http://schemas.microsoft.com/office/drawing/2014/main" id="{0CF10E9B-EFFE-6FE7-F19B-44AEF96F8D45}"/>
+              </a:ext>
+            </a:extLst>
+          </p:cNvPr>
+          <p:cNvSpPr txBox="1"/>
+          <p:nvPr/>
+        </p:nvSpPr>
+        <p:spPr>
+          <a:xfrm rot="-5400000">
+            <a:off x="15108912" y="5007610"/>
+            <a:ext cx="5064457" cy="271780"/>
+          </a:xfrm>
+          <a:prstGeom prst="rect">
+            <a:avLst/>
+          </a:prstGeom>
+        </p:spPr>
+        <p:txBody>
+          <a:bodyPr lIns="0" tIns="0" rIns="0" bIns="0" rtlCol="0" anchor="t">
+            <a:spAutoFit/>
+          </a:bodyPr>
+          <a:lstStyle/>
+          <a:p>
+            <a:pPr marL="0" lvl="0" indent="0" algn="ctr">
+              <a:lnSpc>
+                <a:spcPts val="2089"/>
+              </a:lnSpc>
+            </a:pPr>
+            <a:r>
+              <a:rPr lang="en-US" sz="1899" spc="613">
+                <a:solidFill>
+                  <a:srgbClr val="E1E1E1"/>
+                </a:solidFill>
+                <a:latin typeface="Josefin Sans Light"/>
+                <a:ea typeface="Josefin Sans Light"/>
+                <a:cs typeface="Josefin Sans Light"/>
+                <a:sym typeface="Josefin Sans Light"/>
+              </a:rPr>
+              <a:t>NORDIC RETAIL GROUP</a:t>
+            </a:r>
+          </a:p>
+        </p:txBody>
+      </p:sp>
+      <p:sp>
+        <p:nvSpPr>
+          <p:cNvPr id="6" name="TextBox 6">
+            <a:extLst>
+              <a:ext uri="{FF2B5EF4-FFF2-40B4-BE49-F238E27FC236}">
+                <a16:creationId xmlns:a16="http://schemas.microsoft.com/office/drawing/2014/main" id="{5E0EC7D7-7313-07BA-569D-6155794235E5}"/>
+              </a:ext>
+            </a:extLst>
+          </p:cNvPr>
+          <p:cNvSpPr txBox="1"/>
+          <p:nvPr/>
+        </p:nvSpPr>
+        <p:spPr>
+          <a:xfrm rot="-5400000">
+            <a:off x="17035528" y="9031816"/>
+            <a:ext cx="1211224" cy="271780"/>
+          </a:xfrm>
+          <a:prstGeom prst="rect">
+            <a:avLst/>
+          </a:prstGeom>
+        </p:spPr>
+        <p:txBody>
+          <a:bodyPr lIns="0" tIns="0" rIns="0" bIns="0" rtlCol="0" anchor="t">
+            <a:spAutoFit/>
+          </a:bodyPr>
+          <a:lstStyle/>
+          <a:p>
+            <a:pPr marL="0" lvl="0" indent="0" algn="l">
+              <a:lnSpc>
+                <a:spcPts val="2089"/>
+              </a:lnSpc>
+            </a:pPr>
+            <a:r>
+              <a:rPr lang="en-US" sz="1899" spc="613">
+                <a:solidFill>
+                  <a:srgbClr val="E1E1E1"/>
+                </a:solidFill>
+                <a:latin typeface="Josefin Sans Light"/>
+                <a:ea typeface="Josefin Sans Light"/>
+                <a:cs typeface="Josefin Sans Light"/>
+                <a:sym typeface="Josefin Sans Light"/>
+              </a:rPr>
+              <a:t>2026</a:t>
+            </a:r>
+          </a:p>
+        </p:txBody>
+      </p:sp>
+      <p:sp>
+        <p:nvSpPr>
+          <p:cNvPr id="8" name="Title 7">
+            <a:extLst>
+              <a:ext uri="{FF2B5EF4-FFF2-40B4-BE49-F238E27FC236}">
+                <a16:creationId xmlns:a16="http://schemas.microsoft.com/office/drawing/2014/main" id="{0222E634-3E1E-AF68-9E45-DED43B0C9EB9}"/>
+              </a:ext>
+            </a:extLst>
+          </p:cNvPr>
+          <p:cNvSpPr>
+            <a:spLocks noGrp="1"/>
+          </p:cNvSpPr>
+          <p:nvPr>
+            <p:ph type="title"/>
+          </p:nvPr>
+        </p:nvSpPr>
+        <p:spPr>
+          <a:xfrm>
+            <a:off x="5029200" y="1028700"/>
+            <a:ext cx="8229600" cy="1143000"/>
+          </a:xfrm>
+        </p:spPr>
+        <p:txBody>
+          <a:bodyPr/>
+          <a:lstStyle/>
+          <a:p>
+            <a:r>
+              <a:rPr lang="en-US" dirty="0">
+                <a:solidFill>
+                  <a:schemeClr val="bg1"/>
+                </a:solidFill>
+              </a:rPr>
+              <a:t>Recommendation &amp; Action</a:t>
+            </a:r>
+          </a:p>
+        </p:txBody>
+      </p:sp>
+      <p:sp>
+        <p:nvSpPr>
+          <p:cNvPr id="9" name="Content Placeholder 8">
+            <a:extLst>
+              <a:ext uri="{FF2B5EF4-FFF2-40B4-BE49-F238E27FC236}">
+                <a16:creationId xmlns:a16="http://schemas.microsoft.com/office/drawing/2014/main" id="{96AC73F0-2340-5A43-60A6-3AE717A463B6}"/>
+              </a:ext>
+            </a:extLst>
+          </p:cNvPr>
+          <p:cNvSpPr>
+            <a:spLocks noGrp="1"/>
+          </p:cNvSpPr>
+          <p:nvPr>
+            <p:ph idx="1"/>
+          </p:nvPr>
+        </p:nvSpPr>
+        <p:spPr>
+          <a:xfrm>
+            <a:off x="2620645" y="2552700"/>
+            <a:ext cx="13046710" cy="5920582"/>
+          </a:xfrm>
+        </p:spPr>
+        <p:txBody>
+          <a:bodyPr>
+            <a:normAutofit lnSpcReduction="10000"/>
+          </a:bodyPr>
+          <a:lstStyle/>
+          <a:p>
+            <a:pPr marL="514350" indent="-514350">
+              <a:buFont typeface="+mj-lt"/>
+              <a:buAutoNum type="arabicPeriod"/>
+            </a:pPr>
+            <a:r>
+              <a:rPr lang="en-US" b="1" dirty="0">
+                <a:solidFill>
+                  <a:schemeClr val="bg1"/>
+                </a:solidFill>
+              </a:rPr>
+              <a:t>Cost Optimization (Priority)</a:t>
+            </a:r>
+            <a:br>
+              <a:rPr lang="en-US" b="1" dirty="0">
+                <a:solidFill>
+                  <a:schemeClr val="bg1"/>
+                </a:solidFill>
+              </a:rPr>
+            </a:br>
+            <a:r>
+              <a:rPr lang="en-US" dirty="0">
+                <a:solidFill>
+                  <a:schemeClr val="bg1"/>
+                </a:solidFill>
+              </a:rPr>
+              <a:t>Optimize operational efficiency during the volatile first half of the year to replicate the sustained high-profit stability observed in the third quarter.</a:t>
+            </a:r>
+          </a:p>
+          <a:p>
+            <a:pPr marL="514350" indent="-514350">
+              <a:buFont typeface="+mj-lt"/>
+              <a:buAutoNum type="arabicPeriod"/>
+            </a:pPr>
+            <a:r>
+              <a:rPr lang="en-US" b="1" dirty="0">
+                <a:solidFill>
+                  <a:schemeClr val="bg1"/>
+                </a:solidFill>
+              </a:rPr>
+              <a:t>Improve Operational Efficiency</a:t>
+            </a:r>
+            <a:br>
+              <a:rPr lang="en-US" b="1" dirty="0">
+                <a:solidFill>
+                  <a:schemeClr val="bg1"/>
+                </a:solidFill>
+              </a:rPr>
+            </a:br>
+            <a:r>
+              <a:rPr lang="en-US" dirty="0">
+                <a:solidFill>
+                  <a:schemeClr val="bg1"/>
+                </a:solidFill>
+              </a:rPr>
+              <a:t>Align expenses with revenue performance </a:t>
+            </a:r>
+            <a:br>
+              <a:rPr lang="en-US" dirty="0">
+                <a:solidFill>
+                  <a:schemeClr val="bg1"/>
+                </a:solidFill>
+              </a:rPr>
+            </a:br>
+            <a:r>
+              <a:rPr lang="en-US" dirty="0">
+                <a:solidFill>
+                  <a:schemeClr val="bg1"/>
+                </a:solidFill>
+              </a:rPr>
+              <a:t>Replicate strategies from top-performing stores </a:t>
+            </a:r>
+          </a:p>
+          <a:p>
+            <a:pPr marL="514350" indent="-514350">
+              <a:buFont typeface="+mj-lt"/>
+              <a:buAutoNum type="arabicPeriod"/>
+            </a:pPr>
+            <a:r>
+              <a:rPr lang="en-US" b="1" dirty="0">
+                <a:solidFill>
+                  <a:schemeClr val="bg1"/>
+                </a:solidFill>
+              </a:rPr>
+              <a:t>Strengthen Business Channels</a:t>
+            </a:r>
+            <a:br>
+              <a:rPr lang="en-US" b="1" dirty="0">
+                <a:solidFill>
+                  <a:schemeClr val="bg1"/>
+                </a:solidFill>
+              </a:rPr>
+            </a:br>
+            <a:r>
+              <a:rPr lang="en-US" dirty="0">
+                <a:solidFill>
+                  <a:schemeClr val="bg1"/>
+                </a:solidFill>
+              </a:rPr>
+              <a:t>Improve performance of underperforming channels (e-commerce) </a:t>
+            </a:r>
+            <a:br>
+              <a:rPr lang="en-US" dirty="0">
+                <a:solidFill>
+                  <a:schemeClr val="bg1"/>
+                </a:solidFill>
+              </a:rPr>
+            </a:br>
+            <a:r>
+              <a:rPr lang="en-US" dirty="0">
+                <a:solidFill>
+                  <a:schemeClr val="bg1"/>
+                </a:solidFill>
+              </a:rPr>
+              <a:t>Optimize investment allocation across channels </a:t>
+            </a:r>
+          </a:p>
+          <a:p>
+            <a:pPr marL="514350" indent="-514350">
+              <a:buFont typeface="+mj-lt"/>
+              <a:buAutoNum type="arabicPeriod"/>
+            </a:pPr>
+            <a:r>
+              <a:rPr lang="en-US" b="1" dirty="0">
+                <a:solidFill>
+                  <a:schemeClr val="bg1"/>
+                </a:solidFill>
+              </a:rPr>
+              <a:t>Scenario-Based Planning</a:t>
+            </a:r>
+            <a:br>
+              <a:rPr lang="en-US" b="1" dirty="0">
+                <a:solidFill>
+                  <a:schemeClr val="bg1"/>
+                </a:solidFill>
+              </a:rPr>
+            </a:br>
+            <a:r>
+              <a:rPr lang="en-US" dirty="0">
+                <a:solidFill>
+                  <a:schemeClr val="bg1"/>
+                </a:solidFill>
+              </a:rPr>
+              <a:t>Use scenario analysis for budgeting and forecasting </a:t>
+            </a:r>
+            <a:br>
+              <a:rPr lang="en-US" dirty="0">
+                <a:solidFill>
+                  <a:schemeClr val="bg1"/>
+                </a:solidFill>
+              </a:rPr>
+            </a:br>
+            <a:r>
+              <a:rPr lang="en-US" dirty="0">
+                <a:solidFill>
+                  <a:schemeClr val="bg1"/>
+                </a:solidFill>
+              </a:rPr>
+              <a:t>Focus on closing the ~$5M gap to Best Case</a:t>
+            </a:r>
+          </a:p>
+        </p:txBody>
+      </p:sp>
+    </p:spTree>
+    <p:extLst>
+      <p:ext uri="{BB962C8B-B14F-4D97-AF65-F5344CB8AC3E}">
+        <p14:creationId xmlns:p14="http://schemas.microsoft.com/office/powerpoint/2010/main" val="1134590727"/>
+      </p:ext>
+    </p:extLst>
+  </p:cSld>
+  <p:clrMapOvr>
+    <a:masterClrMapping/>
+  </p:clrMapOvr>
+</p:sld>
+</file>
+
 <file path=ppt/slides/slide2.xml><?xml version="1.0" encoding="utf-8"?>
 <p:sld xmlns:a="http://schemas.openxmlformats.org/drawingml/2006/main" xmlns:r="http://schemas.openxmlformats.org/officeDocument/2006/relationships" xmlns:p="http://schemas.openxmlformats.org/presentationml/2006/main">
   <p:cSld>
@@ -3711,52 +4128,6 @@
       </p:sp>
       <p:sp>
         <p:nvSpPr>
-          <p:cNvPr id="4" name="Freeform 4"/>
-          <p:cNvSpPr/>
-          <p:nvPr/>
-        </p:nvSpPr>
-        <p:spPr>
-          <a:xfrm>
-            <a:off x="6512178" y="2963659"/>
-            <a:ext cx="10747122" cy="4359681"/>
-          </a:xfrm>
-          <a:custGeom>
-            <a:avLst/>
-            <a:gdLst/>
-            <a:ahLst/>
-            <a:cxnLst/>
-            <a:rect l="l" t="t" r="r" b="b"/>
-            <a:pathLst>
-              <a:path w="10747122" h="4359681">
-                <a:moveTo>
-                  <a:pt x="0" y="0"/>
-                </a:moveTo>
-                <a:lnTo>
-                  <a:pt x="10747122" y="0"/>
-                </a:lnTo>
-                <a:lnTo>
-                  <a:pt x="10747122" y="4359682"/>
-                </a:lnTo>
-                <a:lnTo>
-                  <a:pt x="0" y="4359682"/>
-                </a:lnTo>
-                <a:lnTo>
-                  <a:pt x="0" y="0"/>
-                </a:lnTo>
-                <a:close/>
-              </a:path>
-            </a:pathLst>
-          </a:custGeom>
-          <a:blipFill>
-            <a:blip r:embed="rId2"/>
-            <a:stretch>
-              <a:fillRect/>
-            </a:stretch>
-          </a:blipFill>
-        </p:spPr>
-      </p:sp>
-      <p:sp>
-        <p:nvSpPr>
           <p:cNvPr id="5" name="TextBox 5"/>
           <p:cNvSpPr txBox="1"/>
           <p:nvPr/>
@@ -3921,13 +4292,24 @@
             <a:r>
               <a:rPr lang="en-US" sz="1904" b="1" dirty="0">
                 <a:solidFill>
-                  <a:srgbClr val="FFFFFF"/>
+                  <a:srgbClr val="00B050"/>
                 </a:solidFill>
                 <a:ea typeface="Open Sans Bold"/>
                 <a:cs typeface="Open Sans Bold"/>
                 <a:sym typeface="Open Sans Bold"/>
               </a:rPr>
-              <a:t>March ($4.5M)</a:t>
+              <a:t>March </a:t>
+            </a:r>
+            <a:r>
+              <a:rPr lang="en-US" sz="2400" b="1" dirty="0">
+                <a:solidFill>
+                  <a:srgbClr val="00B050"/>
+                </a:solidFill>
+                <a:ea typeface="Open Sans Bold"/>
+                <a:cs typeface="Open Sans Bold"/>
+                <a:sym typeface="Open Sans Bold"/>
+              </a:rPr>
+              <a:t>($4.5M)</a:t>
             </a:r>
             <a:r>
               <a:rPr lang="en-US" sz="1904" dirty="0">
@@ -3941,9 +4323,9 @@
               <a:t> while maintaining a consistent baseline above </a:t>
             </a:r>
             <a:r>
-              <a:rPr lang="en-US" sz="1904" b="1" dirty="0">
-                <a:solidFill>
-                  <a:srgbClr val="FFFFFF"/>
+              <a:rPr lang="en-US" sz="2400" b="1" dirty="0">
+                <a:solidFill>
+                  <a:srgbClr val="FF0000"/>
                 </a:solidFill>
                 <a:ea typeface="Open Sans Bold"/>
                 <a:cs typeface="Open Sans Bold"/>
@@ -3952,7 +4334,7 @@
               <a:t>$3.7M</a:t>
             </a:r>
             <a:r>
-              <a:rPr lang="en-US" sz="1904" dirty="0">
+              <a:rPr lang="en-US" sz="2400" dirty="0">
                 <a:solidFill>
                   <a:srgbClr val="FFFFFF"/>
                 </a:solidFill>
@@ -3960,551 +4342,156 @@
                 <a:cs typeface="Open Sans Light"/>
                 <a:sym typeface="Open Sans Light"/>
               </a:rPr>
-              <a:t> throughout the fiscal year</a:t>
-            </a:r>
-          </a:p>
-        </p:txBody>
-      </p:sp>
-      <p:grpSp>
-        <p:nvGrpSpPr>
-          <p:cNvPr id="9" name="Group 9"/>
-          <p:cNvGrpSpPr/>
+              <a:t> </a:t>
+            </a:r>
+            <a:r>
+              <a:rPr lang="en-US" sz="1904" dirty="0">
+                <a:solidFill>
+                  <a:srgbClr val="FFFFFF"/>
+                </a:solidFill>
+                <a:ea typeface="Open Sans Light"/>
+                <a:cs typeface="Open Sans Light"/>
+                <a:sym typeface="Open Sans Light"/>
+              </a:rPr>
+              <a:t>throughout the fiscal year</a:t>
+            </a:r>
+          </a:p>
+        </p:txBody>
+      </p:sp>
+      <p:pic>
+        <p:nvPicPr>
+          <p:cNvPr id="14" name="Picture 13">
+            <a:extLst>
+              <a:ext uri="{FF2B5EF4-FFF2-40B4-BE49-F238E27FC236}">
+                <a16:creationId xmlns:a16="http://schemas.microsoft.com/office/drawing/2014/main" id="{0DBCBB5A-7CF2-CA76-187E-22AF6965ACE1}"/>
+              </a:ext>
+            </a:extLst>
+          </p:cNvPr>
+          <p:cNvPicPr>
+            <a:picLocks noChangeAspect="1"/>
+          </p:cNvPicPr>
           <p:nvPr/>
-        </p:nvGrpSpPr>
-        <p:grpSpPr>
+        </p:nvPicPr>
+        <p:blipFill>
+          <a:blip r:embed="rId2"/>
+          <a:stretch>
+            <a:fillRect/>
+          </a:stretch>
+        </p:blipFill>
+        <p:spPr>
           <a:xfrm>
-            <a:off x="8981122" y="3712845"/>
-            <a:ext cx="1385888" cy="1092518"/>
-            <a:chOff x="0" y="0"/>
-            <a:chExt cx="1847850" cy="1456690"/>
-          </a:xfrm>
-        </p:grpSpPr>
-        <p:sp>
-          <p:nvSpPr>
-            <p:cNvPr id="10" name="Freeform 10"/>
-            <p:cNvSpPr/>
-            <p:nvPr/>
-          </p:nvSpPr>
-          <p:spPr>
-            <a:xfrm>
-              <a:off x="50800" y="45346"/>
-              <a:ext cx="1751612" cy="1366917"/>
-            </a:xfrm>
-            <a:custGeom>
-              <a:avLst/>
-              <a:gdLst/>
-              <a:ahLst/>
-              <a:cxnLst/>
-              <a:rect l="l" t="t" r="r" b="b"/>
-              <a:pathLst>
-                <a:path w="1751612" h="1366917">
-                  <a:moveTo>
-                    <a:pt x="741680" y="344544"/>
-                  </a:moveTo>
-                  <a:cubicBezTo>
-                    <a:pt x="415290" y="329304"/>
-                    <a:pt x="370840" y="333114"/>
-                    <a:pt x="322580" y="347084"/>
-                  </a:cubicBezTo>
-                  <a:cubicBezTo>
-                    <a:pt x="273050" y="362324"/>
-                    <a:pt x="219710" y="385184"/>
-                    <a:pt x="180340" y="416934"/>
-                  </a:cubicBezTo>
-                  <a:cubicBezTo>
-                    <a:pt x="143510" y="446144"/>
-                    <a:pt x="113030" y="481704"/>
-                    <a:pt x="92710" y="526154"/>
-                  </a:cubicBezTo>
-                  <a:cubicBezTo>
-                    <a:pt x="68580" y="578224"/>
-                    <a:pt x="55880" y="648074"/>
-                    <a:pt x="57150" y="714114"/>
-                  </a:cubicBezTo>
-                  <a:cubicBezTo>
-                    <a:pt x="58420" y="791584"/>
-                    <a:pt x="80010" y="885564"/>
-                    <a:pt x="114300" y="960494"/>
-                  </a:cubicBezTo>
-                  <a:cubicBezTo>
-                    <a:pt x="148590" y="1036694"/>
-                    <a:pt x="200660" y="1114164"/>
-                    <a:pt x="262890" y="1167504"/>
-                  </a:cubicBezTo>
-                  <a:cubicBezTo>
-                    <a:pt x="325120" y="1222114"/>
-                    <a:pt x="406400" y="1261484"/>
-                    <a:pt x="491490" y="1284344"/>
-                  </a:cubicBezTo>
-                  <a:cubicBezTo>
-                    <a:pt x="582930" y="1309744"/>
-                    <a:pt x="690880" y="1318634"/>
-                    <a:pt x="796290" y="1302124"/>
-                  </a:cubicBezTo>
-                  <a:cubicBezTo>
-                    <a:pt x="915670" y="1284344"/>
-                    <a:pt x="1056640" y="1220844"/>
-                    <a:pt x="1168400" y="1162424"/>
-                  </a:cubicBezTo>
-                  <a:cubicBezTo>
-                    <a:pt x="1271270" y="1106544"/>
-                    <a:pt x="1366520" y="1035424"/>
-                    <a:pt x="1442720" y="964304"/>
-                  </a:cubicBezTo>
-                  <a:cubicBezTo>
-                    <a:pt x="1510030" y="902074"/>
-                    <a:pt x="1570990" y="834764"/>
-                    <a:pt x="1611630" y="766184"/>
-                  </a:cubicBezTo>
-                  <a:cubicBezTo>
-                    <a:pt x="1645920" y="705224"/>
-                    <a:pt x="1667510" y="641724"/>
-                    <a:pt x="1680210" y="579494"/>
-                  </a:cubicBezTo>
-                  <a:cubicBezTo>
-                    <a:pt x="1692910" y="519804"/>
-                    <a:pt x="1701800" y="456304"/>
-                    <a:pt x="1689100" y="399154"/>
-                  </a:cubicBezTo>
-                  <a:cubicBezTo>
-                    <a:pt x="1675130" y="342004"/>
-                    <a:pt x="1644650" y="279774"/>
-                    <a:pt x="1600200" y="235324"/>
-                  </a:cubicBezTo>
-                  <a:cubicBezTo>
-                    <a:pt x="1551940" y="187064"/>
-                    <a:pt x="1487170" y="154044"/>
-                    <a:pt x="1398270" y="127374"/>
-                  </a:cubicBezTo>
-                  <a:cubicBezTo>
-                    <a:pt x="1254760" y="82924"/>
-                    <a:pt x="864870" y="84194"/>
-                    <a:pt x="801370" y="61334"/>
-                  </a:cubicBezTo>
-                  <a:cubicBezTo>
-                    <a:pt x="788670" y="56254"/>
-                    <a:pt x="782320" y="53714"/>
-                    <a:pt x="779780" y="46094"/>
-                  </a:cubicBezTo>
-                  <a:cubicBezTo>
-                    <a:pt x="775970" y="37204"/>
-                    <a:pt x="778510" y="18154"/>
-                    <a:pt x="784860" y="11804"/>
-                  </a:cubicBezTo>
-                  <a:cubicBezTo>
-                    <a:pt x="789940" y="5454"/>
-                    <a:pt x="803910" y="2914"/>
-                    <a:pt x="811530" y="5454"/>
-                  </a:cubicBezTo>
-                  <a:cubicBezTo>
-                    <a:pt x="819150" y="6724"/>
-                    <a:pt x="828040" y="15614"/>
-                    <a:pt x="831850" y="21964"/>
-                  </a:cubicBezTo>
-                  <a:cubicBezTo>
-                    <a:pt x="834390" y="29584"/>
-                    <a:pt x="833120" y="42284"/>
-                    <a:pt x="828040" y="48634"/>
-                  </a:cubicBezTo>
-                  <a:cubicBezTo>
-                    <a:pt x="822960" y="56254"/>
-                    <a:pt x="803910" y="62604"/>
-                    <a:pt x="795020" y="60064"/>
-                  </a:cubicBezTo>
-                  <a:cubicBezTo>
-                    <a:pt x="787400" y="56254"/>
-                    <a:pt x="775970" y="39744"/>
-                    <a:pt x="775970" y="30854"/>
-                  </a:cubicBezTo>
-                  <a:cubicBezTo>
-                    <a:pt x="775970" y="23234"/>
-                    <a:pt x="778510" y="14344"/>
-                    <a:pt x="789940" y="7994"/>
-                  </a:cubicBezTo>
-                  <a:cubicBezTo>
-                    <a:pt x="844550" y="-18676"/>
-                    <a:pt x="1271270" y="25774"/>
-                    <a:pt x="1424940" y="76574"/>
-                  </a:cubicBezTo>
-                  <a:cubicBezTo>
-                    <a:pt x="1522730" y="108324"/>
-                    <a:pt x="1593850" y="148964"/>
-                    <a:pt x="1647190" y="206114"/>
-                  </a:cubicBezTo>
-                  <a:cubicBezTo>
-                    <a:pt x="1696720" y="258184"/>
-                    <a:pt x="1731010" y="331844"/>
-                    <a:pt x="1744980" y="397884"/>
-                  </a:cubicBezTo>
-                  <a:cubicBezTo>
-                    <a:pt x="1758950" y="462654"/>
-                    <a:pt x="1748790" y="532504"/>
-                    <a:pt x="1733550" y="598544"/>
-                  </a:cubicBezTo>
-                  <a:cubicBezTo>
-                    <a:pt x="1719580" y="668394"/>
-                    <a:pt x="1694180" y="736974"/>
-                    <a:pt x="1656080" y="801744"/>
-                  </a:cubicBezTo>
-                  <a:cubicBezTo>
-                    <a:pt x="1611630" y="875404"/>
-                    <a:pt x="1548130" y="946524"/>
-                    <a:pt x="1477010" y="1011294"/>
-                  </a:cubicBezTo>
-                  <a:cubicBezTo>
-                    <a:pt x="1395730" y="1084954"/>
-                    <a:pt x="1296670" y="1158614"/>
-                    <a:pt x="1188720" y="1215764"/>
-                  </a:cubicBezTo>
-                  <a:cubicBezTo>
-                    <a:pt x="1071880" y="1276724"/>
-                    <a:pt x="922020" y="1341494"/>
-                    <a:pt x="795020" y="1359274"/>
-                  </a:cubicBezTo>
-                  <a:cubicBezTo>
-                    <a:pt x="681990" y="1375784"/>
-                    <a:pt x="565150" y="1364354"/>
-                    <a:pt x="466090" y="1336414"/>
-                  </a:cubicBezTo>
-                  <a:cubicBezTo>
-                    <a:pt x="374650" y="1309744"/>
-                    <a:pt x="285750" y="1264024"/>
-                    <a:pt x="218440" y="1203064"/>
-                  </a:cubicBezTo>
-                  <a:cubicBezTo>
-                    <a:pt x="149860" y="1143374"/>
-                    <a:pt x="95250" y="1058284"/>
-                    <a:pt x="58420" y="974464"/>
-                  </a:cubicBezTo>
-                  <a:cubicBezTo>
-                    <a:pt x="22860" y="891914"/>
-                    <a:pt x="0" y="790314"/>
-                    <a:pt x="0" y="705224"/>
-                  </a:cubicBezTo>
-                  <a:cubicBezTo>
-                    <a:pt x="0" y="630294"/>
-                    <a:pt x="17780" y="550284"/>
-                    <a:pt x="45720" y="491864"/>
-                  </a:cubicBezTo>
-                  <a:cubicBezTo>
-                    <a:pt x="71120" y="439794"/>
-                    <a:pt x="109220" y="399154"/>
-                    <a:pt x="152400" y="364864"/>
-                  </a:cubicBezTo>
-                  <a:cubicBezTo>
-                    <a:pt x="198120" y="330574"/>
-                    <a:pt x="259080" y="305174"/>
-                    <a:pt x="313690" y="288664"/>
-                  </a:cubicBezTo>
-                  <a:cubicBezTo>
-                    <a:pt x="365760" y="272154"/>
-                    <a:pt x="415290" y="269614"/>
-                    <a:pt x="472440" y="267074"/>
-                  </a:cubicBezTo>
-                  <a:cubicBezTo>
-                    <a:pt x="542290" y="263264"/>
-                    <a:pt x="645160" y="260724"/>
-                    <a:pt x="701040" y="272154"/>
-                  </a:cubicBezTo>
-                  <a:cubicBezTo>
-                    <a:pt x="734060" y="278504"/>
-                    <a:pt x="769620" y="287394"/>
-                    <a:pt x="777240" y="301364"/>
-                  </a:cubicBezTo>
-                  <a:cubicBezTo>
-                    <a:pt x="782320" y="311524"/>
-                    <a:pt x="777240" y="329304"/>
-                    <a:pt x="770890" y="336924"/>
-                  </a:cubicBezTo>
-                  <a:cubicBezTo>
-                    <a:pt x="764540" y="343274"/>
-                    <a:pt x="741680" y="344544"/>
-                    <a:pt x="741680" y="344544"/>
-                  </a:cubicBezTo>
-                </a:path>
-              </a:pathLst>
-            </a:custGeom>
+            <a:off x="6934200" y="2611271"/>
+            <a:ext cx="10325100" cy="4038936"/>
+          </a:xfrm>
+          <a:prstGeom prst="rect">
+            <a:avLst/>
+          </a:prstGeom>
+        </p:spPr>
+      </p:pic>
+      <p:sp>
+        <p:nvSpPr>
+          <p:cNvPr id="29" name="Oval 28">
+            <a:extLst>
+              <a:ext uri="{FF2B5EF4-FFF2-40B4-BE49-F238E27FC236}">
+                <a16:creationId xmlns:a16="http://schemas.microsoft.com/office/drawing/2014/main" id="{BC15E850-FF4F-ECA6-8FB5-AB80619F07A7}"/>
+              </a:ext>
+            </a:extLst>
+          </p:cNvPr>
+          <p:cNvSpPr/>
+          <p:nvPr/>
+        </p:nvSpPr>
+        <p:spPr>
+          <a:xfrm>
+            <a:off x="9138634" y="2991246"/>
+            <a:ext cx="1524000" cy="707946"/>
+          </a:xfrm>
+          <a:prstGeom prst="ellipse">
+            <a:avLst/>
+          </a:prstGeom>
+          <a:noFill/>
+          <a:ln w="38100">
             <a:solidFill>
-              <a:srgbClr val="E7191F"/>
+              <a:srgbClr val="00B050"/>
             </a:solidFill>
-            <a:ln cap="sq">
-              <a:noFill/>
-              <a:prstDash val="solid"/>
-              <a:miter/>
-            </a:ln>
-          </p:spPr>
-        </p:sp>
-      </p:grpSp>
-      <p:grpSp>
-        <p:nvGrpSpPr>
-          <p:cNvPr id="11" name="Group 11"/>
-          <p:cNvGrpSpPr/>
+          </a:ln>
+        </p:spPr>
+        <p:style>
+          <a:lnRef idx="2">
+            <a:schemeClr val="accent1">
+              <a:shade val="15000"/>
+            </a:schemeClr>
+          </a:lnRef>
+          <a:fillRef idx="1">
+            <a:schemeClr val="accent1"/>
+          </a:fillRef>
+          <a:effectRef idx="0">
+            <a:schemeClr val="accent1"/>
+          </a:effectRef>
+          <a:fontRef idx="minor">
+            <a:schemeClr val="lt1"/>
+          </a:fontRef>
+        </p:style>
+        <p:txBody>
+          <a:bodyPr rtlCol="0" anchor="ctr"/>
+          <a:lstStyle/>
+          <a:p>
+            <a:pPr algn="ctr"/>
+            <a:endParaRPr lang="en-US"/>
+          </a:p>
+        </p:txBody>
+      </p:sp>
+      <p:sp>
+        <p:nvSpPr>
+          <p:cNvPr id="31" name="Oval 30">
+            <a:extLst>
+              <a:ext uri="{FF2B5EF4-FFF2-40B4-BE49-F238E27FC236}">
+                <a16:creationId xmlns:a16="http://schemas.microsoft.com/office/drawing/2014/main" id="{7EADF9FF-2C20-8F6F-CA17-F23BF657645F}"/>
+              </a:ext>
+            </a:extLst>
+          </p:cNvPr>
+          <p:cNvSpPr/>
           <p:nvPr/>
-        </p:nvGrpSpPr>
-        <p:grpSpPr>
+        </p:nvSpPr>
+        <p:spPr>
           <a:xfrm>
-            <a:off x="8260080" y="5021580"/>
-            <a:ext cx="1244918" cy="1124902"/>
-            <a:chOff x="0" y="0"/>
-            <a:chExt cx="1659890" cy="1499870"/>
-          </a:xfrm>
-        </p:grpSpPr>
-        <p:sp>
-          <p:nvSpPr>
-            <p:cNvPr id="12" name="Freeform 12"/>
-            <p:cNvSpPr/>
-            <p:nvPr/>
-          </p:nvSpPr>
-          <p:spPr>
-            <a:xfrm>
-              <a:off x="50720" y="49252"/>
-              <a:ext cx="1564569" cy="1405610"/>
-            </a:xfrm>
-            <a:custGeom>
-              <a:avLst/>
-              <a:gdLst/>
-              <a:ahLst/>
-              <a:cxnLst/>
-              <a:rect l="l" t="t" r="r" b="b"/>
-              <a:pathLst>
-                <a:path w="1564569" h="1405610">
-                  <a:moveTo>
-                    <a:pt x="729060" y="228878"/>
-                  </a:moveTo>
-                  <a:cubicBezTo>
-                    <a:pt x="538560" y="203478"/>
-                    <a:pt x="480140" y="207288"/>
-                    <a:pt x="429340" y="218718"/>
-                  </a:cubicBezTo>
-                  <a:cubicBezTo>
-                    <a:pt x="377270" y="230148"/>
-                    <a:pt x="323930" y="246658"/>
-                    <a:pt x="280750" y="274598"/>
-                  </a:cubicBezTo>
-                  <a:cubicBezTo>
-                    <a:pt x="237570" y="303808"/>
-                    <a:pt x="199470" y="341908"/>
-                    <a:pt x="168990" y="390168"/>
-                  </a:cubicBezTo>
-                  <a:cubicBezTo>
-                    <a:pt x="134700" y="444778"/>
-                    <a:pt x="110570" y="517168"/>
-                    <a:pt x="91520" y="594638"/>
-                  </a:cubicBezTo>
-                  <a:cubicBezTo>
-                    <a:pt x="69930" y="686078"/>
-                    <a:pt x="55960" y="805458"/>
-                    <a:pt x="57230" y="904518"/>
-                  </a:cubicBezTo>
-                  <a:cubicBezTo>
-                    <a:pt x="59770" y="993418"/>
-                    <a:pt x="67390" y="1091208"/>
-                    <a:pt x="95330" y="1159788"/>
-                  </a:cubicBezTo>
-                  <a:cubicBezTo>
-                    <a:pt x="118190" y="1214398"/>
-                    <a:pt x="153750" y="1261388"/>
-                    <a:pt x="191850" y="1293138"/>
-                  </a:cubicBezTo>
-                  <a:cubicBezTo>
-                    <a:pt x="227410" y="1319808"/>
-                    <a:pt x="264240" y="1337588"/>
-                    <a:pt x="311230" y="1345208"/>
-                  </a:cubicBezTo>
-                  <a:cubicBezTo>
-                    <a:pt x="373460" y="1356638"/>
-                    <a:pt x="457280" y="1347748"/>
-                    <a:pt x="536020" y="1326158"/>
-                  </a:cubicBezTo>
-                  <a:cubicBezTo>
-                    <a:pt x="635080" y="1300758"/>
-                    <a:pt x="753190" y="1238528"/>
-                    <a:pt x="854790" y="1181378"/>
-                  </a:cubicBezTo>
-                  <a:cubicBezTo>
-                    <a:pt x="958930" y="1122958"/>
-                    <a:pt x="1063070" y="1056918"/>
-                    <a:pt x="1151970" y="980718"/>
-                  </a:cubicBezTo>
-                  <a:cubicBezTo>
-                    <a:pt x="1238330" y="908328"/>
-                    <a:pt x="1325960" y="821968"/>
-                    <a:pt x="1383110" y="736878"/>
-                  </a:cubicBezTo>
-                  <a:cubicBezTo>
-                    <a:pt x="1432640" y="664488"/>
-                    <a:pt x="1469470" y="584478"/>
-                    <a:pt x="1489790" y="509548"/>
-                  </a:cubicBezTo>
-                  <a:cubicBezTo>
-                    <a:pt x="1506300" y="443508"/>
-                    <a:pt x="1515190" y="371118"/>
-                    <a:pt x="1502490" y="313968"/>
-                  </a:cubicBezTo>
-                  <a:cubicBezTo>
-                    <a:pt x="1489790" y="265708"/>
-                    <a:pt x="1458040" y="219988"/>
-                    <a:pt x="1426290" y="186968"/>
-                  </a:cubicBezTo>
-                  <a:cubicBezTo>
-                    <a:pt x="1395810" y="153948"/>
-                    <a:pt x="1362790" y="133628"/>
-                    <a:pt x="1314530" y="113308"/>
-                  </a:cubicBezTo>
-                  <a:cubicBezTo>
-                    <a:pt x="1238330" y="82828"/>
-                    <a:pt x="1038940" y="86638"/>
-                    <a:pt x="1003380" y="54888"/>
-                  </a:cubicBezTo>
-                  <a:cubicBezTo>
-                    <a:pt x="989410" y="43458"/>
-                    <a:pt x="986870" y="23138"/>
-                    <a:pt x="990680" y="14248"/>
-                  </a:cubicBezTo>
-                  <a:cubicBezTo>
-                    <a:pt x="994490" y="6628"/>
-                    <a:pt x="1013540" y="-2262"/>
-                    <a:pt x="1022430" y="1548"/>
-                  </a:cubicBezTo>
-                  <a:cubicBezTo>
-                    <a:pt x="1031320" y="4088"/>
-                    <a:pt x="1045290" y="28218"/>
-                    <a:pt x="1042750" y="37108"/>
-                  </a:cubicBezTo>
-                  <a:cubicBezTo>
-                    <a:pt x="1040210" y="45998"/>
-                    <a:pt x="1014810" y="58698"/>
-                    <a:pt x="1005920" y="56158"/>
-                  </a:cubicBezTo>
-                  <a:cubicBezTo>
-                    <a:pt x="997030" y="53618"/>
-                    <a:pt x="986870" y="35838"/>
-                    <a:pt x="986870" y="26948"/>
-                  </a:cubicBezTo>
-                  <a:cubicBezTo>
-                    <a:pt x="986870" y="18058"/>
-                    <a:pt x="991950" y="9168"/>
-                    <a:pt x="1002110" y="4088"/>
-                  </a:cubicBezTo>
-                  <a:cubicBezTo>
-                    <a:pt x="1030050" y="-9882"/>
-                    <a:pt x="1149430" y="15518"/>
-                    <a:pt x="1210390" y="26948"/>
-                  </a:cubicBezTo>
-                  <a:cubicBezTo>
-                    <a:pt x="1261190" y="37108"/>
-                    <a:pt x="1303100" y="44728"/>
-                    <a:pt x="1345010" y="65048"/>
-                  </a:cubicBezTo>
-                  <a:cubicBezTo>
-                    <a:pt x="1390730" y="87908"/>
-                    <a:pt x="1438990" y="117118"/>
-                    <a:pt x="1474550" y="156488"/>
-                  </a:cubicBezTo>
-                  <a:cubicBezTo>
-                    <a:pt x="1511380" y="198398"/>
-                    <a:pt x="1545670" y="254278"/>
-                    <a:pt x="1558370" y="312698"/>
-                  </a:cubicBezTo>
-                  <a:cubicBezTo>
-                    <a:pt x="1572340" y="378738"/>
-                    <a:pt x="1560910" y="460018"/>
-                    <a:pt x="1541860" y="532408"/>
-                  </a:cubicBezTo>
-                  <a:cubicBezTo>
-                    <a:pt x="1520270" y="613688"/>
-                    <a:pt x="1478360" y="697508"/>
-                    <a:pt x="1425020" y="776248"/>
-                  </a:cubicBezTo>
-                  <a:cubicBezTo>
-                    <a:pt x="1364060" y="863878"/>
-                    <a:pt x="1273890" y="952778"/>
-                    <a:pt x="1184990" y="1027708"/>
-                  </a:cubicBezTo>
-                  <a:cubicBezTo>
-                    <a:pt x="1092280" y="1105178"/>
-                    <a:pt x="985600" y="1173758"/>
-                    <a:pt x="878920" y="1233448"/>
-                  </a:cubicBezTo>
-                  <a:cubicBezTo>
-                    <a:pt x="772240" y="1293138"/>
-                    <a:pt x="647780" y="1357908"/>
-                    <a:pt x="541100" y="1383308"/>
-                  </a:cubicBezTo>
-                  <a:cubicBezTo>
-                    <a:pt x="453470" y="1404898"/>
-                    <a:pt x="360760" y="1412518"/>
-                    <a:pt x="289640" y="1398548"/>
-                  </a:cubicBezTo>
-                  <a:cubicBezTo>
-                    <a:pt x="233760" y="1387118"/>
-                    <a:pt x="189310" y="1362988"/>
-                    <a:pt x="148670" y="1328698"/>
-                  </a:cubicBezTo>
-                  <a:cubicBezTo>
-                    <a:pt x="104220" y="1289328"/>
-                    <a:pt x="64850" y="1234718"/>
-                    <a:pt x="39450" y="1171218"/>
-                  </a:cubicBezTo>
-                  <a:cubicBezTo>
-                    <a:pt x="10240" y="1095018"/>
-                    <a:pt x="1350" y="993418"/>
-                    <a:pt x="80" y="898168"/>
-                  </a:cubicBezTo>
-                  <a:cubicBezTo>
-                    <a:pt x="-1190" y="795298"/>
-                    <a:pt x="12780" y="669568"/>
-                    <a:pt x="36910" y="573048"/>
-                  </a:cubicBezTo>
-                  <a:cubicBezTo>
-                    <a:pt x="58500" y="490498"/>
-                    <a:pt x="86440" y="411758"/>
-                    <a:pt x="127080" y="350798"/>
-                  </a:cubicBezTo>
-                  <a:cubicBezTo>
-                    <a:pt x="162640" y="297458"/>
-                    <a:pt x="207090" y="253008"/>
-                    <a:pt x="257890" y="221258"/>
-                  </a:cubicBezTo>
-                  <a:cubicBezTo>
-                    <a:pt x="307420" y="189508"/>
-                    <a:pt x="367110" y="171728"/>
-                    <a:pt x="424260" y="159028"/>
-                  </a:cubicBezTo>
-                  <a:cubicBezTo>
-                    <a:pt x="480140" y="146328"/>
-                    <a:pt x="542370" y="143788"/>
-                    <a:pt x="598250" y="146328"/>
-                  </a:cubicBezTo>
-                  <a:cubicBezTo>
-                    <a:pt x="651590" y="148868"/>
-                    <a:pt x="730330" y="153948"/>
-                    <a:pt x="753190" y="172998"/>
-                  </a:cubicBezTo>
-                  <a:cubicBezTo>
-                    <a:pt x="763350" y="181888"/>
-                    <a:pt x="767160" y="197128"/>
-                    <a:pt x="764620" y="206018"/>
-                  </a:cubicBezTo>
-                  <a:cubicBezTo>
-                    <a:pt x="760810" y="216178"/>
-                    <a:pt x="729060" y="228878"/>
-                    <a:pt x="729060" y="228878"/>
-                  </a:cubicBezTo>
-                </a:path>
-              </a:pathLst>
-            </a:custGeom>
+            <a:off x="8305800" y="4112455"/>
+            <a:ext cx="1524000" cy="707946"/>
+          </a:xfrm>
+          <a:prstGeom prst="ellipse">
+            <a:avLst/>
+          </a:prstGeom>
+          <a:noFill/>
+          <a:ln w="38100">
             <a:solidFill>
-              <a:srgbClr val="E7191F"/>
+              <a:srgbClr val="FF0000"/>
             </a:solidFill>
-            <a:ln cap="sq">
-              <a:noFill/>
-              <a:prstDash val="solid"/>
-              <a:miter/>
-            </a:ln>
-          </p:spPr>
-        </p:sp>
-      </p:grpSp>
+          </a:ln>
+        </p:spPr>
+        <p:style>
+          <a:lnRef idx="2">
+            <a:schemeClr val="accent1">
+              <a:shade val="15000"/>
+            </a:schemeClr>
+          </a:lnRef>
+          <a:fillRef idx="1">
+            <a:schemeClr val="accent1"/>
+          </a:fillRef>
+          <a:effectRef idx="0">
+            <a:schemeClr val="accent1"/>
+          </a:effectRef>
+          <a:fontRef idx="minor">
+            <a:schemeClr val="lt1"/>
+          </a:fontRef>
+        </p:style>
+        <p:txBody>
+          <a:bodyPr rtlCol="0" anchor="ctr"/>
+          <a:lstStyle/>
+          <a:p>
+            <a:pPr algn="ctr"/>
+            <a:endParaRPr lang="en-US"/>
+          </a:p>
+        </p:txBody>
+      </p:sp>
     </p:spTree>
   </p:cSld>
   <p:clrMapOvr>
@@ -4514,6 +4501,500 @@
 </file>
 
 <file path=ppt/slides/slide3.xml><?xml version="1.0" encoding="utf-8"?>
+<p:sld xmlns:a="http://schemas.openxmlformats.org/drawingml/2006/main" xmlns:r="http://schemas.openxmlformats.org/officeDocument/2006/relationships" xmlns:p="http://schemas.openxmlformats.org/presentationml/2006/main">
+  <p:cSld>
+    <p:bg>
+      <p:bgPr>
+        <a:solidFill>
+          <a:srgbClr val="172944"/>
+        </a:solidFill>
+        <a:effectLst/>
+      </p:bgPr>
+    </p:bg>
+    <p:spTree>
+      <p:nvGrpSpPr>
+        <p:cNvPr id="1" name="">
+          <a:extLst>
+            <a:ext uri="{FF2B5EF4-FFF2-40B4-BE49-F238E27FC236}">
+              <a16:creationId xmlns:a16="http://schemas.microsoft.com/office/drawing/2014/main" id="{A6996A0A-BD28-EC0A-5111-2AA74F13FA4D}"/>
+            </a:ext>
+          </a:extLst>
+        </p:cNvPr>
+        <p:cNvGrpSpPr/>
+        <p:nvPr/>
+      </p:nvGrpSpPr>
+      <p:grpSpPr>
+        <a:xfrm>
+          <a:off x="0" y="0"/>
+          <a:ext cx="0" cy="0"/>
+          <a:chOff x="0" y="0"/>
+          <a:chExt cx="0" cy="0"/>
+        </a:xfrm>
+      </p:grpSpPr>
+      <p:sp>
+        <p:nvSpPr>
+          <p:cNvPr id="2" name="AutoShape 2">
+            <a:extLst>
+              <a:ext uri="{FF2B5EF4-FFF2-40B4-BE49-F238E27FC236}">
+                <a16:creationId xmlns:a16="http://schemas.microsoft.com/office/drawing/2014/main" id="{556824C3-AD04-39E8-5637-E7FD7918C52D}"/>
+              </a:ext>
+            </a:extLst>
+          </p:cNvPr>
+          <p:cNvSpPr/>
+          <p:nvPr/>
+        </p:nvSpPr>
+        <p:spPr>
+          <a:xfrm flipV="1">
+            <a:off x="17580241" y="513682"/>
+            <a:ext cx="0" cy="354402"/>
+          </a:xfrm>
+          <a:prstGeom prst="line">
+            <a:avLst/>
+          </a:prstGeom>
+          <a:ln w="19050" cap="flat">
+            <a:solidFill>
+              <a:srgbClr val="FFFFFF"/>
+            </a:solidFill>
+            <a:prstDash val="solid"/>
+            <a:headEnd type="none" w="sm" len="sm"/>
+            <a:tailEnd type="none" w="sm" len="sm"/>
+          </a:ln>
+        </p:spPr>
+      </p:sp>
+      <p:sp>
+        <p:nvSpPr>
+          <p:cNvPr id="3" name="AutoShape 3">
+            <a:extLst>
+              <a:ext uri="{FF2B5EF4-FFF2-40B4-BE49-F238E27FC236}">
+                <a16:creationId xmlns:a16="http://schemas.microsoft.com/office/drawing/2014/main" id="{31E66F7C-4761-564B-5CC8-3B17DB2AA542}"/>
+              </a:ext>
+            </a:extLst>
+          </p:cNvPr>
+          <p:cNvSpPr/>
+          <p:nvPr/>
+        </p:nvSpPr>
+        <p:spPr>
+          <a:xfrm flipV="1">
+            <a:off x="17692515" y="513682"/>
+            <a:ext cx="0" cy="354402"/>
+          </a:xfrm>
+          <a:prstGeom prst="line">
+            <a:avLst/>
+          </a:prstGeom>
+          <a:ln w="19050" cap="flat">
+            <a:solidFill>
+              <a:srgbClr val="FFFFFF"/>
+            </a:solidFill>
+            <a:prstDash val="solid"/>
+            <a:headEnd type="none" w="sm" len="sm"/>
+            <a:tailEnd type="none" w="sm" len="sm"/>
+          </a:ln>
+        </p:spPr>
+      </p:sp>
+      <p:sp>
+        <p:nvSpPr>
+          <p:cNvPr id="5" name="TextBox 5">
+            <a:extLst>
+              <a:ext uri="{FF2B5EF4-FFF2-40B4-BE49-F238E27FC236}">
+                <a16:creationId xmlns:a16="http://schemas.microsoft.com/office/drawing/2014/main" id="{C9BFE4C1-FEE3-76F7-111D-0DB498CAF251}"/>
+              </a:ext>
+            </a:extLst>
+          </p:cNvPr>
+          <p:cNvSpPr txBox="1"/>
+          <p:nvPr/>
+        </p:nvSpPr>
+        <p:spPr>
+          <a:xfrm rot="-5400000">
+            <a:off x="15108912" y="5007610"/>
+            <a:ext cx="5064457" cy="271780"/>
+          </a:xfrm>
+          <a:prstGeom prst="rect">
+            <a:avLst/>
+          </a:prstGeom>
+        </p:spPr>
+        <p:txBody>
+          <a:bodyPr lIns="0" tIns="0" rIns="0" bIns="0" rtlCol="0" anchor="t">
+            <a:spAutoFit/>
+          </a:bodyPr>
+          <a:lstStyle/>
+          <a:p>
+            <a:pPr marL="0" lvl="0" indent="0" algn="ctr">
+              <a:lnSpc>
+                <a:spcPts val="2089"/>
+              </a:lnSpc>
+            </a:pPr>
+            <a:r>
+              <a:rPr lang="en-US" sz="1899" spc="613">
+                <a:solidFill>
+                  <a:srgbClr val="E1E1E1"/>
+                </a:solidFill>
+                <a:latin typeface="Josefin Sans Light"/>
+                <a:ea typeface="Josefin Sans Light"/>
+                <a:cs typeface="Josefin Sans Light"/>
+                <a:sym typeface="Josefin Sans Light"/>
+              </a:rPr>
+              <a:t>NORDIC RETAIL GROUP</a:t>
+            </a:r>
+          </a:p>
+        </p:txBody>
+      </p:sp>
+      <p:sp>
+        <p:nvSpPr>
+          <p:cNvPr id="6" name="TextBox 6">
+            <a:extLst>
+              <a:ext uri="{FF2B5EF4-FFF2-40B4-BE49-F238E27FC236}">
+                <a16:creationId xmlns:a16="http://schemas.microsoft.com/office/drawing/2014/main" id="{38D4585D-954A-D142-129A-C76F31BB5AA4}"/>
+              </a:ext>
+            </a:extLst>
+          </p:cNvPr>
+          <p:cNvSpPr txBox="1"/>
+          <p:nvPr/>
+        </p:nvSpPr>
+        <p:spPr>
+          <a:xfrm rot="-5400000">
+            <a:off x="17035528" y="9031816"/>
+            <a:ext cx="1211224" cy="271780"/>
+          </a:xfrm>
+          <a:prstGeom prst="rect">
+            <a:avLst/>
+          </a:prstGeom>
+        </p:spPr>
+        <p:txBody>
+          <a:bodyPr lIns="0" tIns="0" rIns="0" bIns="0" rtlCol="0" anchor="t">
+            <a:spAutoFit/>
+          </a:bodyPr>
+          <a:lstStyle/>
+          <a:p>
+            <a:pPr marL="0" lvl="0" indent="0" algn="l">
+              <a:lnSpc>
+                <a:spcPts val="2089"/>
+              </a:lnSpc>
+            </a:pPr>
+            <a:r>
+              <a:rPr lang="en-US" sz="1899" spc="613">
+                <a:solidFill>
+                  <a:srgbClr val="E1E1E1"/>
+                </a:solidFill>
+                <a:latin typeface="Josefin Sans Light"/>
+                <a:ea typeface="Josefin Sans Light"/>
+                <a:cs typeface="Josefin Sans Light"/>
+                <a:sym typeface="Josefin Sans Light"/>
+              </a:rPr>
+              <a:t>2026</a:t>
+            </a:r>
+          </a:p>
+        </p:txBody>
+      </p:sp>
+      <p:sp>
+        <p:nvSpPr>
+          <p:cNvPr id="7" name="TextBox 7">
+            <a:extLst>
+              <a:ext uri="{FF2B5EF4-FFF2-40B4-BE49-F238E27FC236}">
+                <a16:creationId xmlns:a16="http://schemas.microsoft.com/office/drawing/2014/main" id="{2C2AE392-A8E3-D35F-4C50-9C19AEBD1F8A}"/>
+              </a:ext>
+            </a:extLst>
+          </p:cNvPr>
+          <p:cNvSpPr txBox="1"/>
+          <p:nvPr/>
+        </p:nvSpPr>
+        <p:spPr>
+          <a:xfrm>
+            <a:off x="1028700" y="2766139"/>
+            <a:ext cx="6492149" cy="450215"/>
+          </a:xfrm>
+          <a:prstGeom prst="rect">
+            <a:avLst/>
+          </a:prstGeom>
+        </p:spPr>
+        <p:txBody>
+          <a:bodyPr lIns="0" tIns="0" rIns="0" bIns="0" rtlCol="0" anchor="t">
+            <a:spAutoFit/>
+          </a:bodyPr>
+          <a:lstStyle/>
+          <a:p>
+            <a:pPr marL="0" lvl="0" indent="0" algn="l">
+              <a:lnSpc>
+                <a:spcPts val="3520"/>
+              </a:lnSpc>
+            </a:pPr>
+            <a:r>
+              <a:rPr lang="en-US" sz="3200" dirty="0">
+                <a:solidFill>
+                  <a:srgbClr val="E1E1E1"/>
+                </a:solidFill>
+                <a:latin typeface="+mj-lt"/>
+                <a:ea typeface="Josefin Sans"/>
+                <a:cs typeface="Josefin Sans"/>
+                <a:sym typeface="Josefin Sans"/>
+              </a:rPr>
+              <a:t>PROFITABILTY</a:t>
+            </a:r>
+          </a:p>
+        </p:txBody>
+      </p:sp>
+      <p:sp>
+        <p:nvSpPr>
+          <p:cNvPr id="8" name="TextBox 8">
+            <a:extLst>
+              <a:ext uri="{FF2B5EF4-FFF2-40B4-BE49-F238E27FC236}">
+                <a16:creationId xmlns:a16="http://schemas.microsoft.com/office/drawing/2014/main" id="{F9AED8A0-412F-00AA-DFAE-EF815F36959C}"/>
+              </a:ext>
+            </a:extLst>
+          </p:cNvPr>
+          <p:cNvSpPr txBox="1"/>
+          <p:nvPr/>
+        </p:nvSpPr>
+        <p:spPr>
+          <a:xfrm>
+            <a:off x="1028700" y="4138933"/>
+            <a:ext cx="5245353" cy="1362937"/>
+          </a:xfrm>
+          <a:prstGeom prst="rect">
+            <a:avLst/>
+          </a:prstGeom>
+        </p:spPr>
+        <p:txBody>
+          <a:bodyPr lIns="0" tIns="0" rIns="0" bIns="0" rtlCol="0" anchor="t">
+            <a:spAutoFit/>
+          </a:bodyPr>
+          <a:lstStyle/>
+          <a:p>
+            <a:pPr algn="l">
+              <a:lnSpc>
+                <a:spcPts val="2665"/>
+              </a:lnSpc>
+              <a:spcBef>
+                <a:spcPct val="0"/>
+              </a:spcBef>
+            </a:pPr>
+            <a:r>
+              <a:rPr lang="en-US" sz="1904" dirty="0">
+                <a:solidFill>
+                  <a:srgbClr val="FFFFFF"/>
+                </a:solidFill>
+                <a:ea typeface="Open Sans Light"/>
+                <a:cs typeface="Open Sans Light"/>
+                <a:sym typeface="Open Sans Light"/>
+              </a:rPr>
+              <a:t>Net profit exhibits a fluctuating but generally stable trend, peaking significantly in </a:t>
+            </a:r>
+            <a:r>
+              <a:rPr lang="en-US" sz="1904" b="1" dirty="0">
+                <a:solidFill>
+                  <a:srgbClr val="00B050"/>
+                </a:solidFill>
+                <a:ea typeface="Open Sans Bold"/>
+                <a:cs typeface="Open Sans Bold"/>
+                <a:sym typeface="Open Sans Bold"/>
+              </a:rPr>
+              <a:t>March </a:t>
+            </a:r>
+            <a:r>
+              <a:rPr lang="en-US" sz="2400" b="1" dirty="0">
+                <a:solidFill>
+                  <a:srgbClr val="00B050"/>
+                </a:solidFill>
+                <a:ea typeface="Open Sans Bold"/>
+                <a:cs typeface="Open Sans Bold"/>
+                <a:sym typeface="Open Sans Bold"/>
+              </a:rPr>
+              <a:t>($4.5M)</a:t>
+            </a:r>
+            <a:r>
+              <a:rPr lang="en-US" sz="1904" dirty="0">
+                <a:solidFill>
+                  <a:srgbClr val="FFFFFF"/>
+                </a:solidFill>
+                <a:ea typeface="Open Sans Light"/>
+                <a:cs typeface="Open Sans Light"/>
+                <a:sym typeface="Open Sans Light"/>
+              </a:rPr>
+              <a:t> while maintaining a consistent baseline above </a:t>
+            </a:r>
+            <a:r>
+              <a:rPr lang="en-US" sz="2400" b="1" dirty="0">
+                <a:solidFill>
+                  <a:srgbClr val="FF0000"/>
+                </a:solidFill>
+                <a:ea typeface="Open Sans Bold"/>
+                <a:cs typeface="Open Sans Bold"/>
+                <a:sym typeface="Open Sans Bold"/>
+              </a:rPr>
+              <a:t>$3.7M</a:t>
+            </a:r>
+            <a:r>
+              <a:rPr lang="en-US" sz="2400" dirty="0">
+                <a:solidFill>
+                  <a:srgbClr val="FFFFFF"/>
+                </a:solidFill>
+                <a:ea typeface="Open Sans Light"/>
+                <a:cs typeface="Open Sans Light"/>
+                <a:sym typeface="Open Sans Light"/>
+              </a:rPr>
+              <a:t> </a:t>
+            </a:r>
+            <a:r>
+              <a:rPr lang="en-US" sz="1904" dirty="0">
+                <a:solidFill>
+                  <a:srgbClr val="FFFFFF"/>
+                </a:solidFill>
+                <a:ea typeface="Open Sans Light"/>
+                <a:cs typeface="Open Sans Light"/>
+                <a:sym typeface="Open Sans Light"/>
+              </a:rPr>
+              <a:t>throughout the fiscal year</a:t>
+            </a:r>
+          </a:p>
+        </p:txBody>
+      </p:sp>
+      <p:pic>
+        <p:nvPicPr>
+          <p:cNvPr id="14" name="Picture 13">
+            <a:extLst>
+              <a:ext uri="{FF2B5EF4-FFF2-40B4-BE49-F238E27FC236}">
+                <a16:creationId xmlns:a16="http://schemas.microsoft.com/office/drawing/2014/main" id="{6F50E6EB-2D7B-FC80-ADF3-238E7CC4A5FF}"/>
+              </a:ext>
+            </a:extLst>
+          </p:cNvPr>
+          <p:cNvPicPr>
+            <a:picLocks noChangeAspect="1"/>
+          </p:cNvPicPr>
+          <p:nvPr/>
+        </p:nvPicPr>
+        <p:blipFill>
+          <a:blip r:embed="rId2"/>
+          <a:stretch>
+            <a:fillRect/>
+          </a:stretch>
+        </p:blipFill>
+        <p:spPr>
+          <a:xfrm>
+            <a:off x="6934200" y="2611271"/>
+            <a:ext cx="10325100" cy="4038936"/>
+          </a:xfrm>
+          <a:prstGeom prst="rect">
+            <a:avLst/>
+          </a:prstGeom>
+        </p:spPr>
+      </p:pic>
+      <p:sp>
+        <p:nvSpPr>
+          <p:cNvPr id="29" name="Oval 28">
+            <a:extLst>
+              <a:ext uri="{FF2B5EF4-FFF2-40B4-BE49-F238E27FC236}">
+                <a16:creationId xmlns:a16="http://schemas.microsoft.com/office/drawing/2014/main" id="{EF802D73-F31D-8918-73A6-6747F66FAEB7}"/>
+              </a:ext>
+            </a:extLst>
+          </p:cNvPr>
+          <p:cNvSpPr/>
+          <p:nvPr/>
+        </p:nvSpPr>
+        <p:spPr>
+          <a:xfrm>
+            <a:off x="9138634" y="2991246"/>
+            <a:ext cx="1524000" cy="707946"/>
+          </a:xfrm>
+          <a:prstGeom prst="ellipse">
+            <a:avLst/>
+          </a:prstGeom>
+          <a:noFill/>
+          <a:ln w="38100">
+            <a:solidFill>
+              <a:srgbClr val="00B050"/>
+            </a:solidFill>
+          </a:ln>
+        </p:spPr>
+        <p:style>
+          <a:lnRef idx="2">
+            <a:schemeClr val="accent1">
+              <a:shade val="15000"/>
+            </a:schemeClr>
+          </a:lnRef>
+          <a:fillRef idx="1">
+            <a:schemeClr val="accent1"/>
+          </a:fillRef>
+          <a:effectRef idx="0">
+            <a:schemeClr val="accent1"/>
+          </a:effectRef>
+          <a:fontRef idx="minor">
+            <a:schemeClr val="lt1"/>
+          </a:fontRef>
+        </p:style>
+        <p:txBody>
+          <a:bodyPr rtlCol="0" anchor="ctr"/>
+          <a:lstStyle/>
+          <a:p>
+            <a:pPr algn="ctr"/>
+            <a:endParaRPr lang="en-US"/>
+          </a:p>
+        </p:txBody>
+      </p:sp>
+      <p:sp>
+        <p:nvSpPr>
+          <p:cNvPr id="31" name="Oval 30">
+            <a:extLst>
+              <a:ext uri="{FF2B5EF4-FFF2-40B4-BE49-F238E27FC236}">
+                <a16:creationId xmlns:a16="http://schemas.microsoft.com/office/drawing/2014/main" id="{CD72C3EA-AE00-43A2-4EBF-DFB61ABF7AC5}"/>
+              </a:ext>
+            </a:extLst>
+          </p:cNvPr>
+          <p:cNvSpPr/>
+          <p:nvPr/>
+        </p:nvSpPr>
+        <p:spPr>
+          <a:xfrm>
+            <a:off x="8305800" y="4112455"/>
+            <a:ext cx="1524000" cy="707946"/>
+          </a:xfrm>
+          <a:prstGeom prst="ellipse">
+            <a:avLst/>
+          </a:prstGeom>
+          <a:noFill/>
+          <a:ln w="38100">
+            <a:solidFill>
+              <a:srgbClr val="FF0000"/>
+            </a:solidFill>
+          </a:ln>
+        </p:spPr>
+        <p:style>
+          <a:lnRef idx="2">
+            <a:schemeClr val="accent1">
+              <a:shade val="15000"/>
+            </a:schemeClr>
+          </a:lnRef>
+          <a:fillRef idx="1">
+            <a:schemeClr val="accent1"/>
+          </a:fillRef>
+          <a:effectRef idx="0">
+            <a:schemeClr val="accent1"/>
+          </a:effectRef>
+          <a:fontRef idx="minor">
+            <a:schemeClr val="lt1"/>
+          </a:fontRef>
+        </p:style>
+        <p:txBody>
+          <a:bodyPr rtlCol="0" anchor="ctr"/>
+          <a:lstStyle/>
+          <a:p>
+            <a:pPr algn="ctr"/>
+            <a:endParaRPr lang="en-US"/>
+          </a:p>
+        </p:txBody>
+      </p:sp>
+    </p:spTree>
+    <p:extLst>
+      <p:ext uri="{BB962C8B-B14F-4D97-AF65-F5344CB8AC3E}">
+        <p14:creationId xmlns:p14="http://schemas.microsoft.com/office/powerpoint/2010/main" val="2401670062"/>
+      </p:ext>
+    </p:extLst>
+  </p:cSld>
+  <p:clrMapOvr>
+    <a:masterClrMapping/>
+  </p:clrMapOvr>
+</p:sld>
+</file>
+
+<file path=ppt/slides/slide4.xml><?xml version="1.0" encoding="utf-8"?>
 <p:sld xmlns:a="http://schemas.openxmlformats.org/drawingml/2006/main" xmlns:r="http://schemas.openxmlformats.org/officeDocument/2006/relationships" xmlns:p="http://schemas.openxmlformats.org/presentationml/2006/main">
   <p:cSld>
     <p:bg>
@@ -4764,7 +5245,7 @@
         <p:spPr>
           <a:xfrm>
             <a:off x="1028700" y="4138933"/>
-            <a:ext cx="5245353" cy="1016689"/>
+            <a:ext cx="5245353" cy="1384995"/>
           </a:xfrm>
           <a:prstGeom prst="rect">
             <a:avLst/>
@@ -4793,596 +5274,192 @@
                 <a:cs typeface="Open Sans Light"/>
                 <a:sym typeface="Open Sans Light"/>
               </a:rPr>
-              <a:t>Gross Margin exhibits high monthly volatility throughout the year, reaching a peak of 189.17% in October following its lowest point of 157.28% in July</a:t>
-            </a:r>
-          </a:p>
-        </p:txBody>
-      </p:sp>
-      <p:grpSp>
-        <p:nvGrpSpPr>
-          <p:cNvPr id="9" name="Group 9"/>
-          <p:cNvGrpSpPr/>
+              <a:t>Gross Margin exhibits high monthly volatility throughout the year, reaching a peak of </a:t>
+            </a:r>
+            <a:r>
+              <a:rPr lang="en-US" sz="2400" b="1" dirty="0">
+                <a:solidFill>
+                  <a:srgbClr val="00B050"/>
+                </a:solidFill>
+                <a:ea typeface="Open Sans Light"/>
+                <a:cs typeface="Open Sans Light"/>
+                <a:sym typeface="Open Sans Light"/>
+              </a:rPr>
+              <a:t>189.17%</a:t>
+            </a:r>
+            <a:r>
+              <a:rPr lang="en-US" sz="1904" dirty="0">
+                <a:solidFill>
+                  <a:srgbClr val="FFFFFF"/>
+                </a:solidFill>
+                <a:ea typeface="Open Sans Light"/>
+                <a:cs typeface="Open Sans Light"/>
+                <a:sym typeface="Open Sans Light"/>
+              </a:rPr>
+              <a:t> in </a:t>
+            </a:r>
+            <a:r>
+              <a:rPr lang="en-US" sz="2400" dirty="0">
+                <a:solidFill>
+                  <a:srgbClr val="00B050"/>
+                </a:solidFill>
+                <a:ea typeface="Open Sans Light"/>
+                <a:cs typeface="Open Sans Light"/>
+                <a:sym typeface="Open Sans Light"/>
+              </a:rPr>
+              <a:t>October</a:t>
+            </a:r>
+            <a:r>
+              <a:rPr lang="en-US" sz="1904" dirty="0">
+                <a:solidFill>
+                  <a:srgbClr val="FFFFFF"/>
+                </a:solidFill>
+                <a:ea typeface="Open Sans Light"/>
+                <a:cs typeface="Open Sans Light"/>
+                <a:sym typeface="Open Sans Light"/>
+              </a:rPr>
+              <a:t> following its lowest point of </a:t>
+            </a:r>
+            <a:r>
+              <a:rPr lang="en-US" sz="2400" b="1" dirty="0">
+                <a:solidFill>
+                  <a:srgbClr val="FF0000"/>
+                </a:solidFill>
+                <a:ea typeface="Open Sans Light"/>
+                <a:cs typeface="Open Sans Light"/>
+                <a:sym typeface="Open Sans Light"/>
+              </a:rPr>
+              <a:t>157.28%</a:t>
+            </a:r>
+            <a:r>
+              <a:rPr lang="en-US" sz="1904" dirty="0">
+                <a:solidFill>
+                  <a:srgbClr val="FFFFFF"/>
+                </a:solidFill>
+                <a:ea typeface="Open Sans Light"/>
+                <a:cs typeface="Open Sans Light"/>
+                <a:sym typeface="Open Sans Light"/>
+              </a:rPr>
+              <a:t> in </a:t>
+            </a:r>
+            <a:r>
+              <a:rPr lang="en-US" sz="2400" b="1" dirty="0">
+                <a:solidFill>
+                  <a:srgbClr val="FF0000"/>
+                </a:solidFill>
+                <a:ea typeface="Open Sans Light"/>
+                <a:cs typeface="Open Sans Light"/>
+                <a:sym typeface="Open Sans Light"/>
+              </a:rPr>
+              <a:t>July</a:t>
+            </a:r>
+          </a:p>
+        </p:txBody>
+      </p:sp>
+      <p:sp>
+        <p:nvSpPr>
+          <p:cNvPr id="13" name="Oval 12">
+            <a:extLst>
+              <a:ext uri="{FF2B5EF4-FFF2-40B4-BE49-F238E27FC236}">
+                <a16:creationId xmlns:a16="http://schemas.microsoft.com/office/drawing/2014/main" id="{B6AA9918-384B-3B6E-10A6-BE1A9B5A91F7}"/>
+              </a:ext>
+            </a:extLst>
+          </p:cNvPr>
+          <p:cNvSpPr/>
           <p:nvPr/>
-        </p:nvGrpSpPr>
-        <p:grpSpPr>
+        </p:nvSpPr>
+        <p:spPr>
           <a:xfrm>
-            <a:off x="14253210" y="3825240"/>
-            <a:ext cx="1556385" cy="921068"/>
-            <a:chOff x="0" y="0"/>
-            <a:chExt cx="2075180" cy="1228090"/>
-          </a:xfrm>
-        </p:grpSpPr>
-        <p:sp>
-          <p:nvSpPr>
-            <p:cNvPr id="10" name="Freeform 10"/>
-            <p:cNvSpPr/>
-            <p:nvPr/>
-          </p:nvSpPr>
-          <p:spPr>
-            <a:xfrm>
-              <a:off x="45795" y="50124"/>
-              <a:ext cx="1979627" cy="1127034"/>
-            </a:xfrm>
-            <a:custGeom>
-              <a:avLst/>
-              <a:gdLst/>
-              <a:ahLst/>
-              <a:cxnLst/>
-              <a:rect l="l" t="t" r="r" b="b"/>
-              <a:pathLst>
-                <a:path w="1979627" h="1127034">
-                  <a:moveTo>
-                    <a:pt x="1093395" y="228006"/>
-                  </a:moveTo>
-                  <a:cubicBezTo>
-                    <a:pt x="869875" y="208956"/>
-                    <a:pt x="796215" y="205146"/>
-                    <a:pt x="726365" y="219116"/>
-                  </a:cubicBezTo>
-                  <a:cubicBezTo>
-                    <a:pt x="647625" y="233086"/>
-                    <a:pt x="554915" y="269916"/>
-                    <a:pt x="488875" y="301666"/>
-                  </a:cubicBezTo>
-                  <a:cubicBezTo>
-                    <a:pt x="435535" y="325796"/>
-                    <a:pt x="397435" y="352466"/>
-                    <a:pt x="352985" y="384216"/>
-                  </a:cubicBezTo>
-                  <a:cubicBezTo>
-                    <a:pt x="304725" y="418506"/>
-                    <a:pt x="252655" y="460416"/>
-                    <a:pt x="210745" y="503596"/>
-                  </a:cubicBezTo>
-                  <a:cubicBezTo>
-                    <a:pt x="172645" y="545506"/>
-                    <a:pt x="135815" y="589956"/>
-                    <a:pt x="110415" y="636946"/>
-                  </a:cubicBezTo>
-                  <a:cubicBezTo>
-                    <a:pt x="86285" y="681396"/>
-                    <a:pt x="64695" y="729656"/>
-                    <a:pt x="58345" y="774106"/>
-                  </a:cubicBezTo>
-                  <a:cubicBezTo>
-                    <a:pt x="53265" y="816016"/>
-                    <a:pt x="54535" y="861736"/>
-                    <a:pt x="68505" y="898566"/>
-                  </a:cubicBezTo>
-                  <a:cubicBezTo>
-                    <a:pt x="82475" y="935396"/>
-                    <a:pt x="109145" y="972226"/>
-                    <a:pt x="140895" y="996356"/>
-                  </a:cubicBezTo>
-                  <a:cubicBezTo>
-                    <a:pt x="176455" y="1023026"/>
-                    <a:pt x="227255" y="1034456"/>
-                    <a:pt x="272975" y="1047156"/>
-                  </a:cubicBezTo>
-                  <a:cubicBezTo>
-                    <a:pt x="317425" y="1058586"/>
-                    <a:pt x="364415" y="1067476"/>
-                    <a:pt x="412675" y="1070016"/>
-                  </a:cubicBezTo>
-                  <a:cubicBezTo>
-                    <a:pt x="464745" y="1072556"/>
-                    <a:pt x="501575" y="1070016"/>
-                    <a:pt x="576505" y="1058586"/>
-                  </a:cubicBezTo>
-                  <a:cubicBezTo>
-                    <a:pt x="745415" y="1033186"/>
-                    <a:pt x="1200075" y="922696"/>
-                    <a:pt x="1393115" y="873166"/>
-                  </a:cubicBezTo>
-                  <a:cubicBezTo>
-                    <a:pt x="1499795" y="846496"/>
-                    <a:pt x="1565835" y="831256"/>
-                    <a:pt x="1639495" y="803316"/>
-                  </a:cubicBezTo>
-                  <a:cubicBezTo>
-                    <a:pt x="1700455" y="779186"/>
-                    <a:pt x="1760145" y="755056"/>
-                    <a:pt x="1803325" y="722036"/>
-                  </a:cubicBezTo>
-                  <a:cubicBezTo>
-                    <a:pt x="1840155" y="694096"/>
-                    <a:pt x="1869365" y="661076"/>
-                    <a:pt x="1889685" y="628056"/>
-                  </a:cubicBezTo>
-                  <a:cubicBezTo>
-                    <a:pt x="1907465" y="597576"/>
-                    <a:pt x="1920165" y="564556"/>
-                    <a:pt x="1923975" y="530266"/>
-                  </a:cubicBezTo>
-                  <a:cubicBezTo>
-                    <a:pt x="1926515" y="495976"/>
-                    <a:pt x="1923975" y="459146"/>
-                    <a:pt x="1907465" y="423586"/>
-                  </a:cubicBezTo>
-                  <a:cubicBezTo>
-                    <a:pt x="1888415" y="380406"/>
-                    <a:pt x="1845235" y="335956"/>
-                    <a:pt x="1799515" y="299126"/>
-                  </a:cubicBezTo>
-                  <a:cubicBezTo>
-                    <a:pt x="1744905" y="253406"/>
-                    <a:pt x="1672515" y="219116"/>
-                    <a:pt x="1595045" y="181016"/>
-                  </a:cubicBezTo>
-                  <a:cubicBezTo>
-                    <a:pt x="1501065" y="135296"/>
-                    <a:pt x="1300405" y="83226"/>
-                    <a:pt x="1267385" y="50206"/>
-                  </a:cubicBezTo>
-                  <a:cubicBezTo>
-                    <a:pt x="1258495" y="41316"/>
-                    <a:pt x="1255955" y="32426"/>
-                    <a:pt x="1257225" y="24806"/>
-                  </a:cubicBezTo>
-                  <a:cubicBezTo>
-                    <a:pt x="1258495" y="15916"/>
-                    <a:pt x="1272465" y="1946"/>
-                    <a:pt x="1281355" y="676"/>
-                  </a:cubicBezTo>
-                  <a:cubicBezTo>
-                    <a:pt x="1288975" y="-1864"/>
-                    <a:pt x="1300405" y="3216"/>
-                    <a:pt x="1306755" y="8296"/>
-                  </a:cubicBezTo>
-                  <a:cubicBezTo>
-                    <a:pt x="1311835" y="14646"/>
-                    <a:pt x="1315645" y="26076"/>
-                    <a:pt x="1313105" y="34966"/>
-                  </a:cubicBezTo>
-                  <a:cubicBezTo>
-                    <a:pt x="1311835" y="42586"/>
-                    <a:pt x="1302945" y="51476"/>
-                    <a:pt x="1296595" y="55286"/>
-                  </a:cubicBezTo>
-                  <a:cubicBezTo>
-                    <a:pt x="1288975" y="57826"/>
-                    <a:pt x="1276275" y="56556"/>
-                    <a:pt x="1269925" y="51476"/>
-                  </a:cubicBezTo>
-                  <a:cubicBezTo>
-                    <a:pt x="1262305" y="46396"/>
-                    <a:pt x="1254685" y="27346"/>
-                    <a:pt x="1258495" y="19726"/>
-                  </a:cubicBezTo>
-                  <a:cubicBezTo>
-                    <a:pt x="1262305" y="9566"/>
-                    <a:pt x="1277545" y="1946"/>
-                    <a:pt x="1296595" y="1946"/>
-                  </a:cubicBezTo>
-                  <a:cubicBezTo>
-                    <a:pt x="1351205" y="676"/>
-                    <a:pt x="1527735" y="84496"/>
-                    <a:pt x="1624255" y="132756"/>
-                  </a:cubicBezTo>
-                  <a:cubicBezTo>
-                    <a:pt x="1706805" y="172126"/>
-                    <a:pt x="1784275" y="210226"/>
-                    <a:pt x="1842695" y="261026"/>
-                  </a:cubicBezTo>
-                  <a:cubicBezTo>
-                    <a:pt x="1893495" y="305476"/>
-                    <a:pt x="1940485" y="360086"/>
-                    <a:pt x="1962075" y="412156"/>
-                  </a:cubicBezTo>
-                  <a:cubicBezTo>
-                    <a:pt x="1979855" y="455336"/>
-                    <a:pt x="1982395" y="504866"/>
-                    <a:pt x="1977315" y="548046"/>
-                  </a:cubicBezTo>
-                  <a:cubicBezTo>
-                    <a:pt x="1972235" y="588686"/>
-                    <a:pt x="1954455" y="629326"/>
-                    <a:pt x="1931595" y="664886"/>
-                  </a:cubicBezTo>
-                  <a:cubicBezTo>
-                    <a:pt x="1907465" y="704256"/>
-                    <a:pt x="1871905" y="741086"/>
-                    <a:pt x="1829995" y="771566"/>
-                  </a:cubicBezTo>
-                  <a:cubicBezTo>
-                    <a:pt x="1781735" y="807126"/>
-                    <a:pt x="1737285" y="827446"/>
-                    <a:pt x="1654735" y="857926"/>
-                  </a:cubicBezTo>
-                  <a:cubicBezTo>
-                    <a:pt x="1483285" y="921426"/>
-                    <a:pt x="1023545" y="1023026"/>
-                    <a:pt x="829235" y="1067476"/>
-                  </a:cubicBezTo>
-                  <a:cubicBezTo>
-                    <a:pt x="722555" y="1091606"/>
-                    <a:pt x="656515" y="1105576"/>
-                    <a:pt x="580315" y="1115736"/>
-                  </a:cubicBezTo>
-                  <a:cubicBezTo>
-                    <a:pt x="516815" y="1123356"/>
-                    <a:pt x="459665" y="1129706"/>
-                    <a:pt x="403785" y="1125896"/>
-                  </a:cubicBezTo>
-                  <a:cubicBezTo>
-                    <a:pt x="350445" y="1123356"/>
-                    <a:pt x="300915" y="1114466"/>
-                    <a:pt x="251385" y="1099226"/>
-                  </a:cubicBezTo>
-                  <a:cubicBezTo>
-                    <a:pt x="199315" y="1083986"/>
-                    <a:pt x="138355" y="1066206"/>
-                    <a:pt x="98985" y="1033186"/>
-                  </a:cubicBezTo>
-                  <a:cubicBezTo>
-                    <a:pt x="59615" y="1001436"/>
-                    <a:pt x="27865" y="953176"/>
-                    <a:pt x="12625" y="906186"/>
-                  </a:cubicBezTo>
-                  <a:cubicBezTo>
-                    <a:pt x="-2615" y="860466"/>
-                    <a:pt x="-2615" y="805856"/>
-                    <a:pt x="5005" y="756326"/>
-                  </a:cubicBezTo>
-                  <a:cubicBezTo>
-                    <a:pt x="13895" y="704256"/>
-                    <a:pt x="36755" y="650916"/>
-                    <a:pt x="64695" y="602656"/>
-                  </a:cubicBezTo>
-                  <a:cubicBezTo>
-                    <a:pt x="92635" y="551856"/>
-                    <a:pt x="132005" y="503596"/>
-                    <a:pt x="173915" y="460416"/>
-                  </a:cubicBezTo>
-                  <a:cubicBezTo>
-                    <a:pt x="217095" y="414696"/>
-                    <a:pt x="272975" y="371516"/>
-                    <a:pt x="323775" y="334686"/>
-                  </a:cubicBezTo>
-                  <a:cubicBezTo>
-                    <a:pt x="370765" y="300396"/>
-                    <a:pt x="411405" y="273726"/>
-                    <a:pt x="467285" y="247056"/>
-                  </a:cubicBezTo>
-                  <a:cubicBezTo>
-                    <a:pt x="538405" y="214036"/>
-                    <a:pt x="637465" y="175936"/>
-                    <a:pt x="720015" y="160696"/>
-                  </a:cubicBezTo>
-                  <a:cubicBezTo>
-                    <a:pt x="793675" y="146726"/>
-                    <a:pt x="869875" y="150536"/>
-                    <a:pt x="938455" y="151806"/>
-                  </a:cubicBezTo>
-                  <a:cubicBezTo>
-                    <a:pt x="996875" y="153076"/>
-                    <a:pt x="1071805" y="150536"/>
-                    <a:pt x="1102285" y="165776"/>
-                  </a:cubicBezTo>
-                  <a:cubicBezTo>
-                    <a:pt x="1117525" y="174666"/>
-                    <a:pt x="1127685" y="187366"/>
-                    <a:pt x="1128955" y="197526"/>
-                  </a:cubicBezTo>
-                  <a:cubicBezTo>
-                    <a:pt x="1130225" y="206416"/>
-                    <a:pt x="1121335" y="217846"/>
-                    <a:pt x="1114985" y="222926"/>
-                  </a:cubicBezTo>
-                  <a:cubicBezTo>
-                    <a:pt x="1109905" y="226736"/>
-                    <a:pt x="1093395" y="228006"/>
-                    <a:pt x="1093395" y="228006"/>
-                  </a:cubicBezTo>
-                </a:path>
-              </a:pathLst>
-            </a:custGeom>
+            <a:off x="14325600" y="3784960"/>
+            <a:ext cx="1524000" cy="707946"/>
+          </a:xfrm>
+          <a:prstGeom prst="ellipse">
+            <a:avLst/>
+          </a:prstGeom>
+          <a:noFill/>
+          <a:ln w="38100">
             <a:solidFill>
-              <a:srgbClr val="E7191F"/>
+              <a:srgbClr val="00B050"/>
             </a:solidFill>
-            <a:ln cap="sq">
-              <a:noFill/>
-              <a:prstDash val="solid"/>
-              <a:miter/>
-            </a:ln>
-          </p:spPr>
-        </p:sp>
-      </p:grpSp>
-      <p:grpSp>
-        <p:nvGrpSpPr>
-          <p:cNvPr id="11" name="Group 11"/>
-          <p:cNvGrpSpPr/>
+          </a:ln>
+        </p:spPr>
+        <p:style>
+          <a:lnRef idx="2">
+            <a:schemeClr val="accent1">
+              <a:shade val="15000"/>
+            </a:schemeClr>
+          </a:lnRef>
+          <a:fillRef idx="1">
+            <a:schemeClr val="accent1"/>
+          </a:fillRef>
+          <a:effectRef idx="0">
+            <a:schemeClr val="accent1"/>
+          </a:effectRef>
+          <a:fontRef idx="minor">
+            <a:schemeClr val="lt1"/>
+          </a:fontRef>
+        </p:style>
+        <p:txBody>
+          <a:bodyPr rtlCol="0" anchor="ctr"/>
+          <a:lstStyle/>
+          <a:p>
+            <a:pPr algn="ctr"/>
+            <a:endParaRPr lang="en-US"/>
+          </a:p>
+        </p:txBody>
+      </p:sp>
+      <p:sp>
+        <p:nvSpPr>
+          <p:cNvPr id="14" name="Oval 13">
+            <a:extLst>
+              <a:ext uri="{FF2B5EF4-FFF2-40B4-BE49-F238E27FC236}">
+                <a16:creationId xmlns:a16="http://schemas.microsoft.com/office/drawing/2014/main" id="{65610A73-AC9C-FE19-D2E0-45D43D204585}"/>
+              </a:ext>
+            </a:extLst>
+          </p:cNvPr>
+          <p:cNvSpPr/>
           <p:nvPr/>
-        </p:nvGrpSpPr>
-        <p:grpSpPr>
+        </p:nvSpPr>
+        <p:spPr>
           <a:xfrm>
-            <a:off x="12110085" y="4936808"/>
-            <a:ext cx="1223962" cy="963930"/>
-            <a:chOff x="0" y="0"/>
-            <a:chExt cx="1631950" cy="1285240"/>
-          </a:xfrm>
-        </p:grpSpPr>
-        <p:sp>
-          <p:nvSpPr>
-            <p:cNvPr id="12" name="Freeform 12"/>
-            <p:cNvSpPr/>
-            <p:nvPr/>
-          </p:nvSpPr>
-          <p:spPr>
-            <a:xfrm>
-              <a:off x="48650" y="49992"/>
-              <a:ext cx="1538440" cy="1190965"/>
-            </a:xfrm>
-            <a:custGeom>
-              <a:avLst/>
-              <a:gdLst/>
-              <a:ahLst/>
-              <a:cxnLst/>
-              <a:rect l="l" t="t" r="r" b="b"/>
-              <a:pathLst>
-                <a:path w="1538440" h="1190965">
-                  <a:moveTo>
-                    <a:pt x="816220" y="153208"/>
-                  </a:moveTo>
-                  <a:cubicBezTo>
-                    <a:pt x="538090" y="140508"/>
-                    <a:pt x="508880" y="151938"/>
-                    <a:pt x="468240" y="165908"/>
-                  </a:cubicBezTo>
-                  <a:cubicBezTo>
-                    <a:pt x="421250" y="182418"/>
-                    <a:pt x="369180" y="204008"/>
-                    <a:pt x="323460" y="230678"/>
-                  </a:cubicBezTo>
-                  <a:cubicBezTo>
-                    <a:pt x="275200" y="258618"/>
-                    <a:pt x="226940" y="292908"/>
-                    <a:pt x="188840" y="331008"/>
-                  </a:cubicBezTo>
-                  <a:cubicBezTo>
-                    <a:pt x="154550" y="367838"/>
-                    <a:pt x="125340" y="405938"/>
-                    <a:pt x="103750" y="454198"/>
-                  </a:cubicBezTo>
-                  <a:cubicBezTo>
-                    <a:pt x="79620" y="510078"/>
-                    <a:pt x="63110" y="585008"/>
-                    <a:pt x="58030" y="651048"/>
-                  </a:cubicBezTo>
-                  <a:cubicBezTo>
-                    <a:pt x="54220" y="719628"/>
-                    <a:pt x="56760" y="798368"/>
-                    <a:pt x="79620" y="858058"/>
-                  </a:cubicBezTo>
-                  <a:cubicBezTo>
-                    <a:pt x="102480" y="913938"/>
-                    <a:pt x="145660" y="963468"/>
-                    <a:pt x="191380" y="1001568"/>
-                  </a:cubicBezTo>
-                  <a:cubicBezTo>
-                    <a:pt x="237100" y="1038398"/>
-                    <a:pt x="294250" y="1061258"/>
-                    <a:pt x="351400" y="1082848"/>
-                  </a:cubicBezTo>
-                  <a:cubicBezTo>
-                    <a:pt x="411090" y="1104438"/>
-                    <a:pt x="478400" y="1120948"/>
-                    <a:pt x="545710" y="1128568"/>
-                  </a:cubicBezTo>
-                  <a:cubicBezTo>
-                    <a:pt x="615560" y="1136188"/>
-                    <a:pt x="689220" y="1136188"/>
-                    <a:pt x="764150" y="1126028"/>
-                  </a:cubicBezTo>
-                  <a:cubicBezTo>
-                    <a:pt x="845430" y="1115868"/>
-                    <a:pt x="935600" y="1094278"/>
-                    <a:pt x="1015610" y="1062528"/>
-                  </a:cubicBezTo>
-                  <a:cubicBezTo>
-                    <a:pt x="1096890" y="1029508"/>
-                    <a:pt x="1181980" y="979978"/>
-                    <a:pt x="1246750" y="929178"/>
-                  </a:cubicBezTo>
-                  <a:cubicBezTo>
-                    <a:pt x="1306440" y="884728"/>
-                    <a:pt x="1358510" y="840278"/>
-                    <a:pt x="1396610" y="780588"/>
-                  </a:cubicBezTo>
-                  <a:cubicBezTo>
-                    <a:pt x="1437250" y="715818"/>
-                    <a:pt x="1469000" y="625648"/>
-                    <a:pt x="1477890" y="551988"/>
-                  </a:cubicBezTo>
-                  <a:cubicBezTo>
-                    <a:pt x="1485510" y="488488"/>
-                    <a:pt x="1484240" y="424988"/>
-                    <a:pt x="1461380" y="367838"/>
-                  </a:cubicBezTo>
-                  <a:cubicBezTo>
-                    <a:pt x="1434710" y="306878"/>
-                    <a:pt x="1392800" y="247188"/>
-                    <a:pt x="1321680" y="201468"/>
-                  </a:cubicBezTo>
-                  <a:cubicBezTo>
-                    <a:pt x="1204840" y="127808"/>
-                    <a:pt x="832730" y="96058"/>
-                    <a:pt x="774310" y="56688"/>
-                  </a:cubicBezTo>
-                  <a:cubicBezTo>
-                    <a:pt x="759070" y="46528"/>
-                    <a:pt x="752720" y="37638"/>
-                    <a:pt x="752720" y="28748"/>
-                  </a:cubicBezTo>
-                  <a:cubicBezTo>
-                    <a:pt x="752720" y="19858"/>
-                    <a:pt x="765420" y="4618"/>
-                    <a:pt x="774310" y="808"/>
-                  </a:cubicBezTo>
-                  <a:cubicBezTo>
-                    <a:pt x="781930" y="-1732"/>
-                    <a:pt x="794630" y="2078"/>
-                    <a:pt x="799710" y="7158"/>
-                  </a:cubicBezTo>
-                  <a:cubicBezTo>
-                    <a:pt x="806060" y="12238"/>
-                    <a:pt x="812410" y="23668"/>
-                    <a:pt x="809870" y="31288"/>
-                  </a:cubicBezTo>
-                  <a:cubicBezTo>
-                    <a:pt x="807330" y="41448"/>
-                    <a:pt x="787010" y="57958"/>
-                    <a:pt x="776850" y="56688"/>
-                  </a:cubicBezTo>
-                  <a:cubicBezTo>
-                    <a:pt x="767960" y="55418"/>
-                    <a:pt x="751450" y="31288"/>
-                    <a:pt x="753990" y="22398"/>
-                  </a:cubicBezTo>
-                  <a:cubicBezTo>
-                    <a:pt x="755260" y="13508"/>
-                    <a:pt x="769230" y="3348"/>
-                    <a:pt x="789550" y="808"/>
-                  </a:cubicBezTo>
-                  <a:cubicBezTo>
-                    <a:pt x="864480" y="-9352"/>
-                    <a:pt x="1236590" y="79548"/>
-                    <a:pt x="1359780" y="162098"/>
-                  </a:cubicBezTo>
-                  <a:cubicBezTo>
-                    <a:pt x="1439790" y="215438"/>
-                    <a:pt x="1488050" y="286558"/>
-                    <a:pt x="1515990" y="357678"/>
-                  </a:cubicBezTo>
-                  <a:cubicBezTo>
-                    <a:pt x="1541390" y="423718"/>
-                    <a:pt x="1542660" y="497378"/>
-                    <a:pt x="1532500" y="569768"/>
-                  </a:cubicBezTo>
-                  <a:cubicBezTo>
-                    <a:pt x="1519800" y="651048"/>
-                    <a:pt x="1482970" y="748838"/>
-                    <a:pt x="1438520" y="818688"/>
-                  </a:cubicBezTo>
-                  <a:cubicBezTo>
-                    <a:pt x="1396610" y="883458"/>
-                    <a:pt x="1339460" y="931718"/>
-                    <a:pt x="1275960" y="978708"/>
-                  </a:cubicBezTo>
-                  <a:cubicBezTo>
-                    <a:pt x="1206110" y="1032048"/>
-                    <a:pt x="1115940" y="1082848"/>
-                    <a:pt x="1029580" y="1117138"/>
-                  </a:cubicBezTo>
-                  <a:cubicBezTo>
-                    <a:pt x="945760" y="1151428"/>
-                    <a:pt x="851780" y="1173018"/>
-                    <a:pt x="765420" y="1183178"/>
-                  </a:cubicBezTo>
-                  <a:cubicBezTo>
-                    <a:pt x="685410" y="1193338"/>
-                    <a:pt x="607940" y="1193338"/>
-                    <a:pt x="533010" y="1184448"/>
-                  </a:cubicBezTo>
-                  <a:cubicBezTo>
-                    <a:pt x="460620" y="1175558"/>
-                    <a:pt x="389500" y="1157778"/>
-                    <a:pt x="324730" y="1133648"/>
-                  </a:cubicBezTo>
-                  <a:cubicBezTo>
-                    <a:pt x="261230" y="1109518"/>
-                    <a:pt x="197730" y="1081578"/>
-                    <a:pt x="146930" y="1037128"/>
-                  </a:cubicBezTo>
-                  <a:cubicBezTo>
-                    <a:pt x="96130" y="992678"/>
-                    <a:pt x="49140" y="931718"/>
-                    <a:pt x="25010" y="866948"/>
-                  </a:cubicBezTo>
-                  <a:cubicBezTo>
-                    <a:pt x="-390" y="799638"/>
-                    <a:pt x="-2930" y="713278"/>
-                    <a:pt x="2150" y="639618"/>
-                  </a:cubicBezTo>
-                  <a:cubicBezTo>
-                    <a:pt x="7230" y="565958"/>
-                    <a:pt x="27550" y="484678"/>
-                    <a:pt x="55490" y="422448"/>
-                  </a:cubicBezTo>
-                  <a:cubicBezTo>
-                    <a:pt x="80890" y="369108"/>
-                    <a:pt x="113910" y="325928"/>
-                    <a:pt x="153280" y="285288"/>
-                  </a:cubicBezTo>
-                  <a:cubicBezTo>
-                    <a:pt x="195190" y="243378"/>
-                    <a:pt x="248530" y="207818"/>
-                    <a:pt x="299330" y="177338"/>
-                  </a:cubicBezTo>
-                  <a:cubicBezTo>
-                    <a:pt x="347590" y="149398"/>
-                    <a:pt x="403470" y="125268"/>
-                    <a:pt x="454270" y="108758"/>
-                  </a:cubicBezTo>
-                  <a:cubicBezTo>
-                    <a:pt x="498720" y="93518"/>
-                    <a:pt x="535550" y="82088"/>
-                    <a:pt x="586350" y="77008"/>
-                  </a:cubicBezTo>
-                  <a:cubicBezTo>
-                    <a:pt x="653660" y="71928"/>
-                    <a:pt x="784470" y="79548"/>
-                    <a:pt x="822570" y="90978"/>
-                  </a:cubicBezTo>
-                  <a:cubicBezTo>
-                    <a:pt x="835270" y="96058"/>
-                    <a:pt x="841620" y="99868"/>
-                    <a:pt x="846700" y="107488"/>
-                  </a:cubicBezTo>
-                  <a:cubicBezTo>
-                    <a:pt x="850510" y="112568"/>
-                    <a:pt x="851780" y="122728"/>
-                    <a:pt x="849240" y="129078"/>
-                  </a:cubicBezTo>
-                  <a:cubicBezTo>
-                    <a:pt x="845430" y="137968"/>
-                    <a:pt x="816220" y="153208"/>
-                    <a:pt x="816220" y="153208"/>
-                  </a:cubicBezTo>
-                </a:path>
-              </a:pathLst>
-            </a:custGeom>
+            <a:off x="12039600" y="4991100"/>
+            <a:ext cx="1524000" cy="707946"/>
+          </a:xfrm>
+          <a:prstGeom prst="ellipse">
+            <a:avLst/>
+          </a:prstGeom>
+          <a:noFill/>
+          <a:ln w="38100">
             <a:solidFill>
-              <a:srgbClr val="E7191F"/>
+              <a:srgbClr val="FF0000"/>
             </a:solidFill>
-            <a:ln cap="sq">
-              <a:noFill/>
-              <a:prstDash val="solid"/>
-              <a:miter/>
-            </a:ln>
-          </p:spPr>
-        </p:sp>
-      </p:grpSp>
+          </a:ln>
+        </p:spPr>
+        <p:style>
+          <a:lnRef idx="2">
+            <a:schemeClr val="accent1">
+              <a:shade val="15000"/>
+            </a:schemeClr>
+          </a:lnRef>
+          <a:fillRef idx="1">
+            <a:schemeClr val="accent1"/>
+          </a:fillRef>
+          <a:effectRef idx="0">
+            <a:schemeClr val="accent1"/>
+          </a:effectRef>
+          <a:fontRef idx="minor">
+            <a:schemeClr val="lt1"/>
+          </a:fontRef>
+        </p:style>
+        <p:txBody>
+          <a:bodyPr rtlCol="0" anchor="ctr"/>
+          <a:lstStyle/>
+          <a:p>
+            <a:pPr algn="ctr"/>
+            <a:endParaRPr lang="en-US"/>
+          </a:p>
+        </p:txBody>
+      </p:sp>
     </p:spTree>
   </p:cSld>
   <p:clrMapOvr>
@@ -5391,7 +5468,7 @@
 </p:sld>
 </file>
 
-<file path=ppt/slides/slide4.xml><?xml version="1.0" encoding="utf-8"?>
+<file path=ppt/slides/slide5.xml><?xml version="1.0" encoding="utf-8"?>
 <p:sld xmlns:a="http://schemas.openxmlformats.org/drawingml/2006/main" xmlns:r="http://schemas.openxmlformats.org/officeDocument/2006/relationships" xmlns:p="http://schemas.openxmlformats.org/presentationml/2006/main">
   <p:cSld>
     <p:bg>
@@ -5793,7 +5870,7 @@
 </p:sld>
 </file>
 
-<file path=ppt/slides/slide5.xml><?xml version="1.0" encoding="utf-8"?>
+<file path=ppt/slides/slide6.xml><?xml version="1.0" encoding="utf-8"?>
 <p:sld xmlns:a="http://schemas.openxmlformats.org/drawingml/2006/main" xmlns:r="http://schemas.openxmlformats.org/officeDocument/2006/relationships" xmlns:p="http://schemas.openxmlformats.org/presentationml/2006/main">
   <p:cSld>
     <p:bg>
@@ -6160,7 +6237,7 @@
 </p:sld>
 </file>
 
-<file path=ppt/slides/slide6.xml><?xml version="1.0" encoding="utf-8"?>
+<file path=ppt/slides/slide7.xml><?xml version="1.0" encoding="utf-8"?>
 <p:sld xmlns:a="http://schemas.openxmlformats.org/drawingml/2006/main" xmlns:r="http://schemas.openxmlformats.org/officeDocument/2006/relationships" xmlns:p="http://schemas.openxmlformats.org/presentationml/2006/main">
   <p:cSld>
     <p:bg>
@@ -6503,7 +6580,7 @@
 </p:sld>
 </file>
 
-<file path=ppt/slides/slide7.xml><?xml version="1.0" encoding="utf-8"?>
+<file path=ppt/slides/slide8.xml><?xml version="1.0" encoding="utf-8"?>
 <p:sld xmlns:a="http://schemas.openxmlformats.org/drawingml/2006/main" xmlns:r="http://schemas.openxmlformats.org/officeDocument/2006/relationships" xmlns:p="http://schemas.openxmlformats.org/presentationml/2006/main">
   <p:cSld>
     <p:bg>
@@ -6876,7 +6953,7 @@
 </p:sld>
 </file>
 
-<file path=ppt/slides/slide8.xml><?xml version="1.0" encoding="utf-8"?>
+<file path=ppt/slides/slide9.xml><?xml version="1.0" encoding="utf-8"?>
 <p:sld xmlns:a="http://schemas.openxmlformats.org/drawingml/2006/main" xmlns:r="http://schemas.openxmlformats.org/officeDocument/2006/relationships" xmlns:p="http://schemas.openxmlformats.org/presentationml/2006/main">
   <p:cSld>
     <p:bg>
@@ -7179,431 +7256,6 @@
         </p:txBody>
       </p:sp>
     </p:spTree>
-  </p:cSld>
-  <p:clrMapOvr>
-    <a:masterClrMapping/>
-  </p:clrMapOvr>
-</p:sld>
-</file>
-
-<file path=ppt/slides/slide9.xml><?xml version="1.0" encoding="utf-8"?>
-<p:sld xmlns:a="http://schemas.openxmlformats.org/drawingml/2006/main" xmlns:r="http://schemas.openxmlformats.org/officeDocument/2006/relationships" xmlns:p="http://schemas.openxmlformats.org/presentationml/2006/main">
-  <p:cSld>
-    <p:bg>
-      <p:bgPr>
-        <a:solidFill>
-          <a:srgbClr val="172944"/>
-        </a:solidFill>
-        <a:effectLst/>
-      </p:bgPr>
-    </p:bg>
-    <p:spTree>
-      <p:nvGrpSpPr>
-        <p:cNvPr id="1" name="">
-          <a:extLst>
-            <a:ext uri="{FF2B5EF4-FFF2-40B4-BE49-F238E27FC236}">
-              <a16:creationId xmlns:a16="http://schemas.microsoft.com/office/drawing/2014/main" id="{166BECD6-AFE9-3503-71DE-A6C8D070B8E3}"/>
-            </a:ext>
-          </a:extLst>
-        </p:cNvPr>
-        <p:cNvGrpSpPr/>
-        <p:nvPr/>
-      </p:nvGrpSpPr>
-      <p:grpSpPr>
-        <a:xfrm>
-          <a:off x="0" y="0"/>
-          <a:ext cx="0" cy="0"/>
-          <a:chOff x="0" y="0"/>
-          <a:chExt cx="0" cy="0"/>
-        </a:xfrm>
-      </p:grpSpPr>
-      <p:sp>
-        <p:nvSpPr>
-          <p:cNvPr id="2" name="AutoShape 2">
-            <a:extLst>
-              <a:ext uri="{FF2B5EF4-FFF2-40B4-BE49-F238E27FC236}">
-                <a16:creationId xmlns:a16="http://schemas.microsoft.com/office/drawing/2014/main" id="{05BBD870-0FDE-413D-A53C-EF5499150FE1}"/>
-              </a:ext>
-            </a:extLst>
-          </p:cNvPr>
-          <p:cNvSpPr/>
-          <p:nvPr/>
-        </p:nvSpPr>
-        <p:spPr>
-          <a:xfrm flipV="1">
-            <a:off x="17580241" y="513682"/>
-            <a:ext cx="0" cy="354402"/>
-          </a:xfrm>
-          <a:prstGeom prst="line">
-            <a:avLst/>
-          </a:prstGeom>
-          <a:ln w="19050" cap="flat">
-            <a:solidFill>
-              <a:srgbClr val="FFFFFF"/>
-            </a:solidFill>
-            <a:prstDash val="solid"/>
-            <a:headEnd type="none" w="sm" len="sm"/>
-            <a:tailEnd type="none" w="sm" len="sm"/>
-          </a:ln>
-        </p:spPr>
-      </p:sp>
-      <p:sp>
-        <p:nvSpPr>
-          <p:cNvPr id="3" name="AutoShape 3">
-            <a:extLst>
-              <a:ext uri="{FF2B5EF4-FFF2-40B4-BE49-F238E27FC236}">
-                <a16:creationId xmlns:a16="http://schemas.microsoft.com/office/drawing/2014/main" id="{939CFFC3-1356-07D5-295C-AEC67FF701F3}"/>
-              </a:ext>
-            </a:extLst>
-          </p:cNvPr>
-          <p:cNvSpPr/>
-          <p:nvPr/>
-        </p:nvSpPr>
-        <p:spPr>
-          <a:xfrm flipV="1">
-            <a:off x="17692515" y="513682"/>
-            <a:ext cx="0" cy="354402"/>
-          </a:xfrm>
-          <a:prstGeom prst="line">
-            <a:avLst/>
-          </a:prstGeom>
-          <a:ln w="19050" cap="flat">
-            <a:solidFill>
-              <a:srgbClr val="FFFFFF"/>
-            </a:solidFill>
-            <a:prstDash val="solid"/>
-            <a:headEnd type="none" w="sm" len="sm"/>
-            <a:tailEnd type="none" w="sm" len="sm"/>
-          </a:ln>
-        </p:spPr>
-      </p:sp>
-      <p:sp>
-        <p:nvSpPr>
-          <p:cNvPr id="5" name="TextBox 5">
-            <a:extLst>
-              <a:ext uri="{FF2B5EF4-FFF2-40B4-BE49-F238E27FC236}">
-                <a16:creationId xmlns:a16="http://schemas.microsoft.com/office/drawing/2014/main" id="{0CF10E9B-EFFE-6FE7-F19B-44AEF96F8D45}"/>
-              </a:ext>
-            </a:extLst>
-          </p:cNvPr>
-          <p:cNvSpPr txBox="1"/>
-          <p:nvPr/>
-        </p:nvSpPr>
-        <p:spPr>
-          <a:xfrm rot="-5400000">
-            <a:off x="15108912" y="5007610"/>
-            <a:ext cx="5064457" cy="271780"/>
-          </a:xfrm>
-          <a:prstGeom prst="rect">
-            <a:avLst/>
-          </a:prstGeom>
-        </p:spPr>
-        <p:txBody>
-          <a:bodyPr lIns="0" tIns="0" rIns="0" bIns="0" rtlCol="0" anchor="t">
-            <a:spAutoFit/>
-          </a:bodyPr>
-          <a:lstStyle/>
-          <a:p>
-            <a:pPr marL="0" lvl="0" indent="0" algn="ctr">
-              <a:lnSpc>
-                <a:spcPts val="2089"/>
-              </a:lnSpc>
-            </a:pPr>
-            <a:r>
-              <a:rPr lang="en-US" sz="1899" spc="613">
-                <a:solidFill>
-                  <a:srgbClr val="E1E1E1"/>
-                </a:solidFill>
-                <a:latin typeface="Josefin Sans Light"/>
-                <a:ea typeface="Josefin Sans Light"/>
-                <a:cs typeface="Josefin Sans Light"/>
-                <a:sym typeface="Josefin Sans Light"/>
-              </a:rPr>
-              <a:t>NORDIC RETAIL GROUP</a:t>
-            </a:r>
-          </a:p>
-        </p:txBody>
-      </p:sp>
-      <p:sp>
-        <p:nvSpPr>
-          <p:cNvPr id="6" name="TextBox 6">
-            <a:extLst>
-              <a:ext uri="{FF2B5EF4-FFF2-40B4-BE49-F238E27FC236}">
-                <a16:creationId xmlns:a16="http://schemas.microsoft.com/office/drawing/2014/main" id="{5E0EC7D7-7313-07BA-569D-6155794235E5}"/>
-              </a:ext>
-            </a:extLst>
-          </p:cNvPr>
-          <p:cNvSpPr txBox="1"/>
-          <p:nvPr/>
-        </p:nvSpPr>
-        <p:spPr>
-          <a:xfrm rot="-5400000">
-            <a:off x="17035528" y="9031816"/>
-            <a:ext cx="1211224" cy="271780"/>
-          </a:xfrm>
-          <a:prstGeom prst="rect">
-            <a:avLst/>
-          </a:prstGeom>
-        </p:spPr>
-        <p:txBody>
-          <a:bodyPr lIns="0" tIns="0" rIns="0" bIns="0" rtlCol="0" anchor="t">
-            <a:spAutoFit/>
-          </a:bodyPr>
-          <a:lstStyle/>
-          <a:p>
-            <a:pPr marL="0" lvl="0" indent="0" algn="l">
-              <a:lnSpc>
-                <a:spcPts val="2089"/>
-              </a:lnSpc>
-            </a:pPr>
-            <a:r>
-              <a:rPr lang="en-US" sz="1899" spc="613">
-                <a:solidFill>
-                  <a:srgbClr val="E1E1E1"/>
-                </a:solidFill>
-                <a:latin typeface="Josefin Sans Light"/>
-                <a:ea typeface="Josefin Sans Light"/>
-                <a:cs typeface="Josefin Sans Light"/>
-                <a:sym typeface="Josefin Sans Light"/>
-              </a:rPr>
-              <a:t>2026</a:t>
-            </a:r>
-          </a:p>
-        </p:txBody>
-      </p:sp>
-      <p:sp>
-        <p:nvSpPr>
-          <p:cNvPr id="8" name="Title 7">
-            <a:extLst>
-              <a:ext uri="{FF2B5EF4-FFF2-40B4-BE49-F238E27FC236}">
-                <a16:creationId xmlns:a16="http://schemas.microsoft.com/office/drawing/2014/main" id="{0222E634-3E1E-AF68-9E45-DED43B0C9EB9}"/>
-              </a:ext>
-            </a:extLst>
-          </p:cNvPr>
-          <p:cNvSpPr>
-            <a:spLocks noGrp="1"/>
-          </p:cNvSpPr>
-          <p:nvPr>
-            <p:ph type="title"/>
-          </p:nvPr>
-        </p:nvSpPr>
-        <p:spPr>
-          <a:xfrm>
-            <a:off x="5029200" y="1028700"/>
-            <a:ext cx="8229600" cy="1143000"/>
-          </a:xfrm>
-        </p:spPr>
-        <p:txBody>
-          <a:bodyPr/>
-          <a:lstStyle/>
-          <a:p>
-            <a:r>
-              <a:rPr lang="en-US" dirty="0">
-                <a:solidFill>
-                  <a:schemeClr val="bg1"/>
-                </a:solidFill>
-              </a:rPr>
-              <a:t>Recommendation &amp; Action</a:t>
-            </a:r>
-          </a:p>
-        </p:txBody>
-      </p:sp>
-      <p:sp>
-        <p:nvSpPr>
-          <p:cNvPr id="9" name="Content Placeholder 8">
-            <a:extLst>
-              <a:ext uri="{FF2B5EF4-FFF2-40B4-BE49-F238E27FC236}">
-                <a16:creationId xmlns:a16="http://schemas.microsoft.com/office/drawing/2014/main" id="{96AC73F0-2340-5A43-60A6-3AE717A463B6}"/>
-              </a:ext>
-            </a:extLst>
-          </p:cNvPr>
-          <p:cNvSpPr>
-            <a:spLocks noGrp="1"/>
-          </p:cNvSpPr>
-          <p:nvPr>
-            <p:ph idx="1"/>
-          </p:nvPr>
-        </p:nvSpPr>
-        <p:spPr>
-          <a:xfrm>
-            <a:off x="2620645" y="2552700"/>
-            <a:ext cx="13046710" cy="5920582"/>
-          </a:xfrm>
-        </p:spPr>
-        <p:txBody>
-          <a:bodyPr>
-            <a:normAutofit lnSpcReduction="10000"/>
-          </a:bodyPr>
-          <a:lstStyle/>
-          <a:p>
-            <a:pPr marL="514350" indent="-514350">
-              <a:buFont typeface="+mj-lt"/>
-              <a:buAutoNum type="arabicPeriod"/>
-            </a:pPr>
-            <a:r>
-              <a:rPr lang="en-US" b="1" dirty="0">
-                <a:solidFill>
-                  <a:schemeClr val="bg1"/>
-                </a:solidFill>
-              </a:rPr>
-              <a:t>Cost Optimization (Priority)</a:t>
-            </a:r>
-            <a:br>
-              <a:rPr lang="en-US" b="1" dirty="0">
-                <a:solidFill>
-                  <a:schemeClr val="bg1"/>
-                </a:solidFill>
-              </a:rPr>
-            </a:br>
-            <a:r>
-              <a:rPr lang="en-US" dirty="0">
-                <a:solidFill>
-                  <a:schemeClr val="bg1"/>
-                </a:solidFill>
-              </a:rPr>
-              <a:t>Optimize operational efficiency during the volatile first half of the year to replicate the sustained high-profit stability observed in the third quarter.</a:t>
-            </a:r>
-          </a:p>
-          <a:p>
-            <a:pPr marL="514350" indent="-514350">
-              <a:buFont typeface="+mj-lt"/>
-              <a:buAutoNum type="arabicPeriod"/>
-            </a:pPr>
-            <a:r>
-              <a:rPr lang="en-US" b="1" dirty="0">
-                <a:solidFill>
-                  <a:schemeClr val="bg1"/>
-                </a:solidFill>
-              </a:rPr>
-              <a:t>Improve Operational Efficiency</a:t>
-            </a:r>
-            <a:br>
-              <a:rPr lang="en-US" b="1" dirty="0">
-                <a:solidFill>
-                  <a:schemeClr val="bg1"/>
-                </a:solidFill>
-              </a:rPr>
-            </a:br>
-            <a:r>
-              <a:rPr lang="en-US" dirty="0">
-                <a:solidFill>
-                  <a:schemeClr val="bg1"/>
-                </a:solidFill>
-              </a:rPr>
-              <a:t>Align expenses with revenue performance </a:t>
-            </a:r>
-            <a:br>
-              <a:rPr lang="en-US" dirty="0">
-                <a:solidFill>
-                  <a:schemeClr val="bg1"/>
-                </a:solidFill>
-              </a:rPr>
-            </a:br>
-            <a:r>
-              <a:rPr lang="en-US" dirty="0">
-                <a:solidFill>
-                  <a:schemeClr val="bg1"/>
-                </a:solidFill>
-              </a:rPr>
-              <a:t>Replicate strategies from top-performing stores </a:t>
-            </a:r>
-          </a:p>
-          <a:p>
-            <a:pPr marL="514350" indent="-514350">
-              <a:buFont typeface="+mj-lt"/>
-              <a:buAutoNum type="arabicPeriod"/>
-            </a:pPr>
-            <a:r>
-              <a:rPr lang="en-US" b="1" dirty="0">
-                <a:solidFill>
-                  <a:schemeClr val="bg1"/>
-                </a:solidFill>
-              </a:rPr>
-              <a:t>Strengthen Business Channels</a:t>
-            </a:r>
-            <a:br>
-              <a:rPr lang="en-US" b="1" dirty="0">
-                <a:solidFill>
-                  <a:schemeClr val="bg1"/>
-                </a:solidFill>
-              </a:rPr>
-            </a:br>
-            <a:r>
-              <a:rPr lang="en-US" dirty="0">
-                <a:solidFill>
-                  <a:schemeClr val="bg1"/>
-                </a:solidFill>
-              </a:rPr>
-              <a:t>Improve performance of underperforming channels (e-commerce) </a:t>
-            </a:r>
-            <a:br>
-              <a:rPr lang="en-US" dirty="0">
-                <a:solidFill>
-                  <a:schemeClr val="bg1"/>
-                </a:solidFill>
-              </a:rPr>
-            </a:br>
-            <a:r>
-              <a:rPr lang="en-US" dirty="0">
-                <a:solidFill>
-                  <a:schemeClr val="bg1"/>
-                </a:solidFill>
-              </a:rPr>
-              <a:t>Optimize investment allocation across channels </a:t>
-            </a:r>
-          </a:p>
-          <a:p>
-            <a:pPr marL="514350" indent="-514350">
-              <a:buFont typeface="+mj-lt"/>
-              <a:buAutoNum type="arabicPeriod"/>
-            </a:pPr>
-            <a:r>
-              <a:rPr lang="en-US" b="1" dirty="0">
-                <a:solidFill>
-                  <a:schemeClr val="bg1"/>
-                </a:solidFill>
-              </a:rPr>
-              <a:t>Scenario-Based Planning</a:t>
-            </a:r>
-            <a:br>
-              <a:rPr lang="en-US" b="1" dirty="0">
-                <a:solidFill>
-                  <a:schemeClr val="bg1"/>
-                </a:solidFill>
-              </a:rPr>
-            </a:br>
-            <a:r>
-              <a:rPr lang="en-US" dirty="0">
-                <a:solidFill>
-                  <a:schemeClr val="bg1"/>
-                </a:solidFill>
-              </a:rPr>
-              <a:t>Use scenario analysis for budgeting and forecasting </a:t>
-            </a:r>
-            <a:br>
-              <a:rPr lang="en-US" dirty="0">
-                <a:solidFill>
-                  <a:schemeClr val="bg1"/>
-                </a:solidFill>
-              </a:rPr>
-            </a:br>
-            <a:r>
-              <a:rPr lang="en-US" dirty="0">
-                <a:solidFill>
-                  <a:schemeClr val="bg1"/>
-                </a:solidFill>
-              </a:rPr>
-              <a:t>Focus on closing the ~$5M gap to Best Case</a:t>
-            </a:r>
-          </a:p>
-        </p:txBody>
-      </p:sp>
-    </p:spTree>
-    <p:extLst>
-      <p:ext uri="{BB962C8B-B14F-4D97-AF65-F5344CB8AC3E}">
-        <p14:creationId xmlns:p14="http://schemas.microsoft.com/office/powerpoint/2010/main" val="1134590727"/>
-      </p:ext>
-    </p:extLst>
   </p:cSld>
   <p:clrMapOvr>
     <a:masterClrMapping/>
